--- a/docs/pptx/whole/ritu-linsubhr-sens-aki2_10pct.pptx
+++ b/docs/pptx/whole/ritu-linsubhr-sens-aki2_10pct.pptx
@@ -2443,7 +2443,7 @@
           </p:nvSpPr>
           <p:spPr>
             <a:xfrm>
-              <a:off x="1165204" y="2073503"/>
+              <a:off x="1166270" y="2073503"/>
               <a:ext cx="0" cy="3649639"/>
             </a:xfrm>
             <a:custGeom>
@@ -2486,7 +2486,7 @@
           </p:nvSpPr>
           <p:spPr>
             <a:xfrm>
-              <a:off x="2068531" y="2073503"/>
+              <a:off x="2068786" y="2073503"/>
               <a:ext cx="0" cy="3649639"/>
             </a:xfrm>
             <a:custGeom>
@@ -2529,7 +2529,7 @@
           </p:nvSpPr>
           <p:spPr>
             <a:xfrm>
-              <a:off x="2971859" y="2073503"/>
+              <a:off x="2971301" y="2073503"/>
               <a:ext cx="0" cy="3649639"/>
             </a:xfrm>
             <a:custGeom>
@@ -2572,7 +2572,7 @@
           </p:nvSpPr>
           <p:spPr>
             <a:xfrm>
-              <a:off x="3875187" y="2073503"/>
+              <a:off x="3873816" y="2073503"/>
               <a:ext cx="0" cy="3649639"/>
             </a:xfrm>
             <a:custGeom>
@@ -2615,7 +2615,7 @@
           </p:nvSpPr>
           <p:spPr>
             <a:xfrm>
-              <a:off x="4778514" y="2073503"/>
+              <a:off x="4776332" y="2073503"/>
               <a:ext cx="0" cy="3649639"/>
             </a:xfrm>
             <a:custGeom>
@@ -2658,7 +2658,7 @@
           </p:nvSpPr>
           <p:spPr>
             <a:xfrm>
-              <a:off x="5681842" y="2073503"/>
+              <a:off x="5678847" y="2073503"/>
               <a:ext cx="0" cy="3649639"/>
             </a:xfrm>
             <a:custGeom>
@@ -2701,7 +2701,7 @@
           </p:nvSpPr>
           <p:spPr>
             <a:xfrm>
-              <a:off x="6585169" y="2073503"/>
+              <a:off x="6581363" y="2073503"/>
               <a:ext cx="0" cy="3649639"/>
             </a:xfrm>
             <a:custGeom>
@@ -2744,7 +2744,7 @@
           </p:nvSpPr>
           <p:spPr>
             <a:xfrm>
-              <a:off x="7488497" y="2073503"/>
+              <a:off x="7483878" y="2073503"/>
               <a:ext cx="0" cy="3649639"/>
             </a:xfrm>
             <a:custGeom>
@@ -2787,7 +2787,7 @@
           </p:nvSpPr>
           <p:spPr>
             <a:xfrm>
-              <a:off x="8391824" y="2073503"/>
+              <a:off x="8386393" y="2073503"/>
               <a:ext cx="0" cy="3649639"/>
             </a:xfrm>
             <a:custGeom>
@@ -3045,7 +3045,7 @@
           </p:nvSpPr>
           <p:spPr>
             <a:xfrm>
-              <a:off x="1616868" y="2073503"/>
+              <a:off x="1617528" y="2073503"/>
               <a:ext cx="0" cy="3649639"/>
             </a:xfrm>
             <a:custGeom>
@@ -3088,7 +3088,7 @@
           </p:nvSpPr>
           <p:spPr>
             <a:xfrm>
-              <a:off x="2520195" y="2073503"/>
+              <a:off x="2520043" y="2073503"/>
               <a:ext cx="0" cy="3649639"/>
             </a:xfrm>
             <a:custGeom>
@@ -3131,7 +3131,7 @@
           </p:nvSpPr>
           <p:spPr>
             <a:xfrm>
-              <a:off x="3423523" y="2073503"/>
+              <a:off x="3422559" y="2073503"/>
               <a:ext cx="0" cy="3649639"/>
             </a:xfrm>
             <a:custGeom>
@@ -3174,7 +3174,7 @@
           </p:nvSpPr>
           <p:spPr>
             <a:xfrm>
-              <a:off x="4326850" y="2073503"/>
+              <a:off x="4325074" y="2073503"/>
               <a:ext cx="0" cy="3649639"/>
             </a:xfrm>
             <a:custGeom>
@@ -3217,7 +3217,7 @@
           </p:nvSpPr>
           <p:spPr>
             <a:xfrm>
-              <a:off x="5230178" y="2073503"/>
+              <a:off x="5227590" y="2073503"/>
               <a:ext cx="0" cy="3649639"/>
             </a:xfrm>
             <a:custGeom>
@@ -3260,7 +3260,7 @@
           </p:nvSpPr>
           <p:spPr>
             <a:xfrm>
-              <a:off x="6133505" y="2073503"/>
+              <a:off x="6130105" y="2073503"/>
               <a:ext cx="0" cy="3649639"/>
             </a:xfrm>
             <a:custGeom>
@@ -3303,7 +3303,7 @@
           </p:nvSpPr>
           <p:spPr>
             <a:xfrm>
-              <a:off x="7036833" y="2073503"/>
+              <a:off x="7032620" y="2073503"/>
               <a:ext cx="0" cy="3649639"/>
             </a:xfrm>
             <a:custGeom>
@@ -3346,7 +3346,7 @@
           </p:nvSpPr>
           <p:spPr>
             <a:xfrm>
-              <a:off x="7940161" y="2073503"/>
+              <a:off x="7935136" y="2073503"/>
               <a:ext cx="0" cy="3649639"/>
             </a:xfrm>
             <a:custGeom>
@@ -3390,584 +3390,584 @@
           <p:spPr>
             <a:xfrm>
               <a:off x="1172049" y="2073503"/>
-              <a:ext cx="7090630" cy="3396298"/>
+              <a:ext cx="7090630" cy="3395846"/>
             </a:xfrm>
             <a:custGeom>
               <a:avLst/>
               <a:pathLst>
-                <a:path w="7090630" h="3396298">
+                <a:path w="7090630" h="3395846">
                   <a:moveTo>
-                    <a:pt x="705016" y="0"/>
+                    <a:pt x="706345" y="0"/>
                   </a:moveTo>
                   <a:lnTo>
-                    <a:pt x="716225" y="22854"/>
-                  </a:lnTo>
-                  <a:lnTo>
-                    <a:pt x="787847" y="162972"/>
-                  </a:lnTo>
-                  <a:lnTo>
-                    <a:pt x="859470" y="297417"/>
-                  </a:lnTo>
-                  <a:lnTo>
-                    <a:pt x="931092" y="426418"/>
-                  </a:lnTo>
-                  <a:lnTo>
-                    <a:pt x="1002715" y="550198"/>
-                  </a:lnTo>
-                  <a:lnTo>
-                    <a:pt x="1074337" y="668965"/>
-                  </a:lnTo>
-                  <a:lnTo>
-                    <a:pt x="1145960" y="782925"/>
-                  </a:lnTo>
-                  <a:lnTo>
-                    <a:pt x="1217582" y="892270"/>
-                  </a:lnTo>
-                  <a:lnTo>
-                    <a:pt x="1289205" y="997189"/>
-                  </a:lnTo>
-                  <a:lnTo>
-                    <a:pt x="1360827" y="1097860"/>
-                  </a:lnTo>
-                  <a:lnTo>
-                    <a:pt x="1432450" y="1194455"/>
-                  </a:lnTo>
-                  <a:lnTo>
-                    <a:pt x="1504073" y="1287139"/>
-                  </a:lnTo>
-                  <a:lnTo>
-                    <a:pt x="1575695" y="1376071"/>
-                  </a:lnTo>
-                  <a:lnTo>
-                    <a:pt x="1647318" y="1461402"/>
-                  </a:lnTo>
-                  <a:lnTo>
-                    <a:pt x="1718940" y="1543279"/>
-                  </a:lnTo>
-                  <a:lnTo>
-                    <a:pt x="1790563" y="1621841"/>
-                  </a:lnTo>
-                  <a:lnTo>
-                    <a:pt x="1862185" y="1697222"/>
-                  </a:lnTo>
-                  <a:lnTo>
-                    <a:pt x="1933808" y="1769551"/>
-                  </a:lnTo>
-                  <a:lnTo>
-                    <a:pt x="2005430" y="1838952"/>
-                  </a:lnTo>
-                  <a:lnTo>
-                    <a:pt x="2077053" y="1905544"/>
-                  </a:lnTo>
-                  <a:lnTo>
-                    <a:pt x="2148675" y="1969439"/>
-                  </a:lnTo>
-                  <a:lnTo>
-                    <a:pt x="2220298" y="2030747"/>
-                  </a:lnTo>
-                  <a:lnTo>
-                    <a:pt x="2291920" y="2089573"/>
-                  </a:lnTo>
-                  <a:lnTo>
-                    <a:pt x="2363543" y="2146018"/>
-                  </a:lnTo>
-                  <a:lnTo>
-                    <a:pt x="2435165" y="2200177"/>
-                  </a:lnTo>
-                  <a:lnTo>
-                    <a:pt x="2506788" y="2252144"/>
-                  </a:lnTo>
-                  <a:lnTo>
-                    <a:pt x="2578410" y="2302006"/>
-                  </a:lnTo>
-                  <a:lnTo>
-                    <a:pt x="2650033" y="2349850"/>
-                  </a:lnTo>
-                  <a:lnTo>
-                    <a:pt x="2721655" y="2395757"/>
-                  </a:lnTo>
-                  <a:lnTo>
-                    <a:pt x="2793278" y="2439806"/>
-                  </a:lnTo>
-                  <a:lnTo>
-                    <a:pt x="2864901" y="2482071"/>
-                  </a:lnTo>
-                  <a:lnTo>
-                    <a:pt x="2936523" y="2522625"/>
-                  </a:lnTo>
-                  <a:lnTo>
-                    <a:pt x="3008146" y="2561537"/>
-                  </a:lnTo>
-                  <a:lnTo>
-                    <a:pt x="3079768" y="2598873"/>
-                  </a:lnTo>
-                  <a:lnTo>
-                    <a:pt x="3151391" y="2634698"/>
-                  </a:lnTo>
-                  <a:lnTo>
-                    <a:pt x="3223013" y="2655396"/>
-                  </a:lnTo>
-                  <a:lnTo>
-                    <a:pt x="3294636" y="2657949"/>
-                  </a:lnTo>
-                  <a:lnTo>
-                    <a:pt x="3366258" y="2660493"/>
-                  </a:lnTo>
-                  <a:lnTo>
-                    <a:pt x="3437881" y="2663030"/>
-                  </a:lnTo>
-                  <a:lnTo>
-                    <a:pt x="3509503" y="2665559"/>
-                  </a:lnTo>
-                  <a:lnTo>
-                    <a:pt x="3581126" y="2668080"/>
-                  </a:lnTo>
-                  <a:lnTo>
-                    <a:pt x="3652748" y="2670593"/>
-                  </a:lnTo>
-                  <a:lnTo>
-                    <a:pt x="3724371" y="2673098"/>
-                  </a:lnTo>
-                  <a:lnTo>
-                    <a:pt x="3795993" y="2675596"/>
-                  </a:lnTo>
-                  <a:lnTo>
-                    <a:pt x="3867616" y="2678086"/>
-                  </a:lnTo>
-                  <a:lnTo>
-                    <a:pt x="3939238" y="2680569"/>
-                  </a:lnTo>
-                  <a:lnTo>
-                    <a:pt x="4010861" y="2683043"/>
-                  </a:lnTo>
-                  <a:lnTo>
-                    <a:pt x="4082483" y="2685510"/>
-                  </a:lnTo>
-                  <a:lnTo>
-                    <a:pt x="4154106" y="2687970"/>
-                  </a:lnTo>
-                  <a:lnTo>
-                    <a:pt x="4225729" y="2690422"/>
-                  </a:lnTo>
-                  <a:lnTo>
-                    <a:pt x="4297351" y="2692866"/>
-                  </a:lnTo>
-                  <a:lnTo>
-                    <a:pt x="4368974" y="2695303"/>
-                  </a:lnTo>
-                  <a:lnTo>
-                    <a:pt x="4440596" y="2697732"/>
-                  </a:lnTo>
-                  <a:lnTo>
-                    <a:pt x="4512219" y="2700154"/>
-                  </a:lnTo>
-                  <a:lnTo>
-                    <a:pt x="4583841" y="2702569"/>
-                  </a:lnTo>
-                  <a:lnTo>
-                    <a:pt x="4655464" y="2704976"/>
-                  </a:lnTo>
-                  <a:lnTo>
-                    <a:pt x="4727086" y="2707375"/>
-                  </a:lnTo>
-                  <a:lnTo>
-                    <a:pt x="4798709" y="2709767"/>
-                  </a:lnTo>
-                  <a:lnTo>
-                    <a:pt x="4870331" y="2712152"/>
-                  </a:lnTo>
-                  <a:lnTo>
-                    <a:pt x="4941954" y="2714530"/>
-                  </a:lnTo>
-                  <a:lnTo>
-                    <a:pt x="5013576" y="2716900"/>
-                  </a:lnTo>
-                  <a:lnTo>
-                    <a:pt x="5085199" y="2719262"/>
-                  </a:lnTo>
-                  <a:lnTo>
-                    <a:pt x="5156821" y="2721618"/>
-                  </a:lnTo>
-                  <a:lnTo>
-                    <a:pt x="5228444" y="2723966"/>
-                  </a:lnTo>
-                  <a:lnTo>
-                    <a:pt x="5300066" y="2726307"/>
-                  </a:lnTo>
-                  <a:lnTo>
-                    <a:pt x="5371689" y="2728641"/>
-                  </a:lnTo>
-                  <a:lnTo>
-                    <a:pt x="5443311" y="2730968"/>
-                  </a:lnTo>
-                  <a:lnTo>
-                    <a:pt x="5514934" y="2733287"/>
-                  </a:lnTo>
-                  <a:lnTo>
-                    <a:pt x="5586557" y="2735600"/>
-                  </a:lnTo>
-                  <a:lnTo>
-                    <a:pt x="5658179" y="2737905"/>
-                  </a:lnTo>
-                  <a:lnTo>
-                    <a:pt x="5729802" y="2740203"/>
-                  </a:lnTo>
-                  <a:lnTo>
-                    <a:pt x="5801424" y="2742494"/>
-                  </a:lnTo>
-                  <a:lnTo>
-                    <a:pt x="5873047" y="2744778"/>
-                  </a:lnTo>
-                  <a:lnTo>
-                    <a:pt x="5944669" y="2747055"/>
-                  </a:lnTo>
-                  <a:lnTo>
-                    <a:pt x="6016292" y="2749325"/>
-                  </a:lnTo>
-                  <a:lnTo>
-                    <a:pt x="6087914" y="2751587"/>
-                  </a:lnTo>
-                  <a:lnTo>
-                    <a:pt x="6159537" y="2753843"/>
-                  </a:lnTo>
-                  <a:lnTo>
-                    <a:pt x="6231159" y="2756092"/>
-                  </a:lnTo>
-                  <a:lnTo>
-                    <a:pt x="6302782" y="2758334"/>
-                  </a:lnTo>
-                  <a:lnTo>
-                    <a:pt x="6374404" y="2760570"/>
-                  </a:lnTo>
-                  <a:lnTo>
-                    <a:pt x="6446027" y="2762798"/>
-                  </a:lnTo>
-                  <a:lnTo>
-                    <a:pt x="6517649" y="2765019"/>
-                  </a:lnTo>
-                  <a:lnTo>
-                    <a:pt x="6589272" y="2767234"/>
-                  </a:lnTo>
-                  <a:lnTo>
-                    <a:pt x="6660894" y="2769441"/>
-                  </a:lnTo>
-                  <a:lnTo>
-                    <a:pt x="6732517" y="2771642"/>
-                  </a:lnTo>
-                  <a:lnTo>
-                    <a:pt x="6804139" y="2773836"/>
-                  </a:lnTo>
-                  <a:lnTo>
-                    <a:pt x="6875762" y="2776024"/>
-                  </a:lnTo>
-                  <a:lnTo>
-                    <a:pt x="6947385" y="2778204"/>
-                  </a:lnTo>
-                  <a:lnTo>
-                    <a:pt x="7019007" y="2780378"/>
-                  </a:lnTo>
-                  <a:lnTo>
-                    <a:pt x="7090630" y="2782546"/>
-                  </a:lnTo>
-                  <a:lnTo>
-                    <a:pt x="7090630" y="3396298"/>
-                  </a:lnTo>
-                  <a:lnTo>
-                    <a:pt x="7019007" y="3392608"/>
-                  </a:lnTo>
-                  <a:lnTo>
-                    <a:pt x="6947385" y="3388762"/>
-                  </a:lnTo>
-                  <a:lnTo>
-                    <a:pt x="6875762" y="3384754"/>
-                  </a:lnTo>
-                  <a:lnTo>
-                    <a:pt x="6804139" y="3380578"/>
-                  </a:lnTo>
-                  <a:lnTo>
-                    <a:pt x="6732517" y="3376224"/>
-                  </a:lnTo>
-                  <a:lnTo>
-                    <a:pt x="6660894" y="3371688"/>
-                  </a:lnTo>
-                  <a:lnTo>
-                    <a:pt x="6589272" y="3366959"/>
-                  </a:lnTo>
-                  <a:lnTo>
-                    <a:pt x="6517649" y="3362032"/>
-                  </a:lnTo>
-                  <a:lnTo>
-                    <a:pt x="6446027" y="3356896"/>
-                  </a:lnTo>
-                  <a:lnTo>
-                    <a:pt x="6374404" y="3351544"/>
-                  </a:lnTo>
-                  <a:lnTo>
-                    <a:pt x="6302782" y="3345965"/>
-                  </a:lnTo>
-                  <a:lnTo>
-                    <a:pt x="6231159" y="3340152"/>
-                  </a:lnTo>
-                  <a:lnTo>
-                    <a:pt x="6159537" y="3334093"/>
-                  </a:lnTo>
-                  <a:lnTo>
-                    <a:pt x="6087914" y="3327778"/>
-                  </a:lnTo>
-                  <a:lnTo>
-                    <a:pt x="6016292" y="3321197"/>
-                  </a:lnTo>
-                  <a:lnTo>
-                    <a:pt x="5944669" y="3314339"/>
-                  </a:lnTo>
-                  <a:lnTo>
-                    <a:pt x="5873047" y="3307191"/>
-                  </a:lnTo>
-                  <a:lnTo>
-                    <a:pt x="5801424" y="3299741"/>
-                  </a:lnTo>
-                  <a:lnTo>
-                    <a:pt x="5729802" y="3291977"/>
-                  </a:lnTo>
-                  <a:lnTo>
-                    <a:pt x="5658179" y="3283886"/>
-                  </a:lnTo>
-                  <a:lnTo>
-                    <a:pt x="5586557" y="3275453"/>
-                  </a:lnTo>
-                  <a:lnTo>
-                    <a:pt x="5514934" y="3266664"/>
-                  </a:lnTo>
-                  <a:lnTo>
-                    <a:pt x="5443311" y="3257504"/>
-                  </a:lnTo>
-                  <a:lnTo>
-                    <a:pt x="5371689" y="3247958"/>
-                  </a:lnTo>
-                  <a:lnTo>
-                    <a:pt x="5300066" y="3238009"/>
-                  </a:lnTo>
-                  <a:lnTo>
-                    <a:pt x="5228444" y="3227640"/>
-                  </a:lnTo>
-                  <a:lnTo>
-                    <a:pt x="5156821" y="3216834"/>
-                  </a:lnTo>
-                  <a:lnTo>
-                    <a:pt x="5085199" y="3205572"/>
-                  </a:lnTo>
-                  <a:lnTo>
-                    <a:pt x="5013576" y="3193834"/>
-                  </a:lnTo>
-                  <a:lnTo>
-                    <a:pt x="4941954" y="3181602"/>
-                  </a:lnTo>
-                  <a:lnTo>
-                    <a:pt x="4870331" y="3168853"/>
-                  </a:lnTo>
-                  <a:lnTo>
-                    <a:pt x="4798709" y="3155566"/>
-                  </a:lnTo>
-                  <a:lnTo>
-                    <a:pt x="4727086" y="3141719"/>
-                  </a:lnTo>
-                  <a:lnTo>
-                    <a:pt x="4655464" y="3127287"/>
-                  </a:lnTo>
-                  <a:lnTo>
-                    <a:pt x="4583841" y="3112247"/>
-                  </a:lnTo>
-                  <a:lnTo>
-                    <a:pt x="4512219" y="3096572"/>
-                  </a:lnTo>
-                  <a:lnTo>
-                    <a:pt x="4440596" y="3080235"/>
-                  </a:lnTo>
-                  <a:lnTo>
-                    <a:pt x="4368974" y="3063209"/>
-                  </a:lnTo>
-                  <a:lnTo>
-                    <a:pt x="4297351" y="3045465"/>
-                  </a:lnTo>
-                  <a:lnTo>
-                    <a:pt x="4225729" y="3026972"/>
-                  </a:lnTo>
-                  <a:lnTo>
-                    <a:pt x="4154106" y="3007699"/>
-                  </a:lnTo>
-                  <a:lnTo>
-                    <a:pt x="4082483" y="2987612"/>
-                  </a:lnTo>
-                  <a:lnTo>
-                    <a:pt x="4010861" y="2966678"/>
-                  </a:lnTo>
-                  <a:lnTo>
-                    <a:pt x="3939238" y="2944861"/>
-                  </a:lnTo>
-                  <a:lnTo>
-                    <a:pt x="3867616" y="2922123"/>
-                  </a:lnTo>
-                  <a:lnTo>
-                    <a:pt x="3795993" y="2898425"/>
-                  </a:lnTo>
-                  <a:lnTo>
-                    <a:pt x="3724371" y="2873728"/>
-                  </a:lnTo>
-                  <a:lnTo>
-                    <a:pt x="3652748" y="2847989"/>
-                  </a:lnTo>
-                  <a:lnTo>
-                    <a:pt x="3581126" y="2821164"/>
-                  </a:lnTo>
-                  <a:lnTo>
-                    <a:pt x="3509503" y="2793206"/>
-                  </a:lnTo>
-                  <a:lnTo>
-                    <a:pt x="3437881" y="2764070"/>
-                  </a:lnTo>
-                  <a:lnTo>
-                    <a:pt x="3366258" y="2733703"/>
-                  </a:lnTo>
-                  <a:lnTo>
-                    <a:pt x="3294636" y="2702056"/>
-                  </a:lnTo>
-                  <a:lnTo>
-                    <a:pt x="3223013" y="2669073"/>
-                  </a:lnTo>
-                  <a:lnTo>
-                    <a:pt x="3151391" y="2652836"/>
-                  </a:lnTo>
-                  <a:lnTo>
-                    <a:pt x="3079768" y="2650268"/>
-                  </a:lnTo>
-                  <a:lnTo>
-                    <a:pt x="3008146" y="2647692"/>
-                  </a:lnTo>
-                  <a:lnTo>
-                    <a:pt x="2936523" y="2645108"/>
-                  </a:lnTo>
-                  <a:lnTo>
-                    <a:pt x="2864901" y="2642516"/>
-                  </a:lnTo>
-                  <a:lnTo>
-                    <a:pt x="2793278" y="2639916"/>
-                  </a:lnTo>
-                  <a:lnTo>
-                    <a:pt x="2721655" y="2637308"/>
-                  </a:lnTo>
-                  <a:lnTo>
-                    <a:pt x="2650033" y="2634692"/>
-                  </a:lnTo>
-                  <a:lnTo>
-                    <a:pt x="2578410" y="2632068"/>
-                  </a:lnTo>
-                  <a:lnTo>
-                    <a:pt x="2506788" y="2629435"/>
-                  </a:lnTo>
-                  <a:lnTo>
-                    <a:pt x="2435165" y="2626795"/>
-                  </a:lnTo>
-                  <a:lnTo>
-                    <a:pt x="2363543" y="2624146"/>
-                  </a:lnTo>
-                  <a:lnTo>
-                    <a:pt x="2291920" y="2621490"/>
-                  </a:lnTo>
-                  <a:lnTo>
-                    <a:pt x="2220298" y="2618825"/>
-                  </a:lnTo>
-                  <a:lnTo>
-                    <a:pt x="2148675" y="2616151"/>
-                  </a:lnTo>
-                  <a:lnTo>
-                    <a:pt x="2077053" y="2613470"/>
-                  </a:lnTo>
-                  <a:lnTo>
-                    <a:pt x="2005430" y="2610780"/>
-                  </a:lnTo>
-                  <a:lnTo>
-                    <a:pt x="1933808" y="2608082"/>
-                  </a:lnTo>
-                  <a:lnTo>
-                    <a:pt x="1862185" y="2605376"/>
-                  </a:lnTo>
-                  <a:lnTo>
-                    <a:pt x="1790563" y="2602661"/>
-                  </a:lnTo>
-                  <a:lnTo>
-                    <a:pt x="1718940" y="2599938"/>
-                  </a:lnTo>
-                  <a:lnTo>
-                    <a:pt x="1647318" y="2597206"/>
-                  </a:lnTo>
-                  <a:lnTo>
-                    <a:pt x="1575695" y="2594466"/>
-                  </a:lnTo>
-                  <a:lnTo>
-                    <a:pt x="1504073" y="2591717"/>
-                  </a:lnTo>
-                  <a:lnTo>
-                    <a:pt x="1432450" y="2588960"/>
-                  </a:lnTo>
-                  <a:lnTo>
-                    <a:pt x="1360827" y="2586195"/>
-                  </a:lnTo>
-                  <a:lnTo>
-                    <a:pt x="1289205" y="2583421"/>
-                  </a:lnTo>
-                  <a:lnTo>
-                    <a:pt x="1217582" y="2580638"/>
-                  </a:lnTo>
-                  <a:lnTo>
-                    <a:pt x="1145960" y="2577847"/>
-                  </a:lnTo>
-                  <a:lnTo>
-                    <a:pt x="1074337" y="2575047"/>
-                  </a:lnTo>
-                  <a:lnTo>
-                    <a:pt x="1002715" y="2572238"/>
-                  </a:lnTo>
-                  <a:lnTo>
-                    <a:pt x="931092" y="2569421"/>
-                  </a:lnTo>
-                  <a:lnTo>
-                    <a:pt x="859470" y="2566595"/>
-                  </a:lnTo>
-                  <a:lnTo>
-                    <a:pt x="787847" y="2563761"/>
-                  </a:lnTo>
-                  <a:lnTo>
-                    <a:pt x="716225" y="2560917"/>
-                  </a:lnTo>
-                  <a:lnTo>
-                    <a:pt x="644602" y="2558065"/>
-                  </a:lnTo>
-                  <a:lnTo>
-                    <a:pt x="572980" y="2555204"/>
-                  </a:lnTo>
-                  <a:lnTo>
-                    <a:pt x="501357" y="2552334"/>
-                  </a:lnTo>
-                  <a:lnTo>
-                    <a:pt x="429735" y="2549455"/>
-                  </a:lnTo>
-                  <a:lnTo>
-                    <a:pt x="358112" y="2546568"/>
-                  </a:lnTo>
-                  <a:lnTo>
-                    <a:pt x="286490" y="2543671"/>
-                  </a:lnTo>
-                  <a:lnTo>
-                    <a:pt x="214867" y="2540766"/>
-                  </a:lnTo>
-                  <a:lnTo>
-                    <a:pt x="143245" y="2537851"/>
-                  </a:lnTo>
-                  <a:lnTo>
-                    <a:pt x="71622" y="2534928"/>
-                  </a:lnTo>
-                  <a:lnTo>
-                    <a:pt x="0" y="2531995"/>
+                    <a:pt x="716225" y="20135"/>
+                  </a:lnTo>
+                  <a:lnTo>
+                    <a:pt x="787847" y="160200"/>
+                  </a:lnTo>
+                  <a:lnTo>
+                    <a:pt x="859470" y="294601"/>
+                  </a:lnTo>
+                  <a:lnTo>
+                    <a:pt x="931092" y="423567"/>
+                  </a:lnTo>
+                  <a:lnTo>
+                    <a:pt x="1002715" y="547317"/>
+                  </a:lnTo>
+                  <a:lnTo>
+                    <a:pt x="1074337" y="666064"/>
+                  </a:lnTo>
+                  <a:lnTo>
+                    <a:pt x="1145960" y="780008"/>
+                  </a:lnTo>
+                  <a:lnTo>
+                    <a:pt x="1217582" y="889344"/>
+                  </a:lnTo>
+                  <a:lnTo>
+                    <a:pt x="1289205" y="994259"/>
+                  </a:lnTo>
+                  <a:lnTo>
+                    <a:pt x="1360827" y="1094932"/>
+                  </a:lnTo>
+                  <a:lnTo>
+                    <a:pt x="1432450" y="1191533"/>
+                  </a:lnTo>
+                  <a:lnTo>
+                    <a:pt x="1504073" y="1284228"/>
+                  </a:lnTo>
+                  <a:lnTo>
+                    <a:pt x="1575695" y="1373174"/>
+                  </a:lnTo>
+                  <a:lnTo>
+                    <a:pt x="1647318" y="1458524"/>
+                  </a:lnTo>
+                  <a:lnTo>
+                    <a:pt x="1718940" y="1540422"/>
+                  </a:lnTo>
+                  <a:lnTo>
+                    <a:pt x="1790563" y="1619008"/>
+                  </a:lnTo>
+                  <a:lnTo>
+                    <a:pt x="1862185" y="1694416"/>
+                  </a:lnTo>
+                  <a:lnTo>
+                    <a:pt x="1933808" y="1766775"/>
+                  </a:lnTo>
+                  <a:lnTo>
+                    <a:pt x="2005430" y="1836207"/>
+                  </a:lnTo>
+                  <a:lnTo>
+                    <a:pt x="2077053" y="1902832"/>
+                  </a:lnTo>
+                  <a:lnTo>
+                    <a:pt x="2148675" y="1966763"/>
+                  </a:lnTo>
+                  <a:lnTo>
+                    <a:pt x="2220298" y="2028108"/>
+                  </a:lnTo>
+                  <a:lnTo>
+                    <a:pt x="2291920" y="2086972"/>
+                  </a:lnTo>
+                  <a:lnTo>
+                    <a:pt x="2363543" y="2143457"/>
+                  </a:lnTo>
+                  <a:lnTo>
+                    <a:pt x="2435165" y="2197657"/>
+                  </a:lnTo>
+                  <a:lnTo>
+                    <a:pt x="2506788" y="2249665"/>
+                  </a:lnTo>
+                  <a:lnTo>
+                    <a:pt x="2578410" y="2299570"/>
+                  </a:lnTo>
+                  <a:lnTo>
+                    <a:pt x="2650033" y="2347457"/>
+                  </a:lnTo>
+                  <a:lnTo>
+                    <a:pt x="2721655" y="2393407"/>
+                  </a:lnTo>
+                  <a:lnTo>
+                    <a:pt x="2793278" y="2437499"/>
+                  </a:lnTo>
+                  <a:lnTo>
+                    <a:pt x="2864901" y="2479809"/>
+                  </a:lnTo>
+                  <a:lnTo>
+                    <a:pt x="2936523" y="2520407"/>
+                  </a:lnTo>
+                  <a:lnTo>
+                    <a:pt x="3008146" y="2559363"/>
+                  </a:lnTo>
+                  <a:lnTo>
+                    <a:pt x="3079768" y="2596744"/>
+                  </a:lnTo>
+                  <a:lnTo>
+                    <a:pt x="3151391" y="2632614"/>
+                  </a:lnTo>
+                  <a:lnTo>
+                    <a:pt x="3223013" y="2655153"/>
+                  </a:lnTo>
+                  <a:lnTo>
+                    <a:pt x="3294636" y="2657468"/>
+                  </a:lnTo>
+                  <a:lnTo>
+                    <a:pt x="3366258" y="2659777"/>
+                  </a:lnTo>
+                  <a:lnTo>
+                    <a:pt x="3437881" y="2662079"/>
+                  </a:lnTo>
+                  <a:lnTo>
+                    <a:pt x="3509503" y="2664374"/>
+                  </a:lnTo>
+                  <a:lnTo>
+                    <a:pt x="3581126" y="2666664"/>
+                  </a:lnTo>
+                  <a:lnTo>
+                    <a:pt x="3652748" y="2668947"/>
+                  </a:lnTo>
+                  <a:lnTo>
+                    <a:pt x="3724371" y="2671223"/>
+                  </a:lnTo>
+                  <a:lnTo>
+                    <a:pt x="3795993" y="2673493"/>
+                  </a:lnTo>
+                  <a:lnTo>
+                    <a:pt x="3867616" y="2675757"/>
+                  </a:lnTo>
+                  <a:lnTo>
+                    <a:pt x="3939238" y="2678014"/>
+                  </a:lnTo>
+                  <a:lnTo>
+                    <a:pt x="4010861" y="2680265"/>
+                  </a:lnTo>
+                  <a:lnTo>
+                    <a:pt x="4082483" y="2682510"/>
+                  </a:lnTo>
+                  <a:lnTo>
+                    <a:pt x="4154106" y="2684749"/>
+                  </a:lnTo>
+                  <a:lnTo>
+                    <a:pt x="4225729" y="2686981"/>
+                  </a:lnTo>
+                  <a:lnTo>
+                    <a:pt x="4297351" y="2689207"/>
+                  </a:lnTo>
+                  <a:lnTo>
+                    <a:pt x="4368974" y="2691427"/>
+                  </a:lnTo>
+                  <a:lnTo>
+                    <a:pt x="4440596" y="2693641"/>
+                  </a:lnTo>
+                  <a:lnTo>
+                    <a:pt x="4512219" y="2695848"/>
+                  </a:lnTo>
+                  <a:lnTo>
+                    <a:pt x="4583841" y="2698049"/>
+                  </a:lnTo>
+                  <a:lnTo>
+                    <a:pt x="4655464" y="2700244"/>
+                  </a:lnTo>
+                  <a:lnTo>
+                    <a:pt x="4727086" y="2702433"/>
+                  </a:lnTo>
+                  <a:lnTo>
+                    <a:pt x="4798709" y="2704616"/>
+                  </a:lnTo>
+                  <a:lnTo>
+                    <a:pt x="4870331" y="2706793"/>
+                  </a:lnTo>
+                  <a:lnTo>
+                    <a:pt x="4941954" y="2708964"/>
+                  </a:lnTo>
+                  <a:lnTo>
+                    <a:pt x="5013576" y="2711128"/>
+                  </a:lnTo>
+                  <a:lnTo>
+                    <a:pt x="5085199" y="2713287"/>
+                  </a:lnTo>
+                  <a:lnTo>
+                    <a:pt x="5156821" y="2715440"/>
+                  </a:lnTo>
+                  <a:lnTo>
+                    <a:pt x="5228444" y="2717586"/>
+                  </a:lnTo>
+                  <a:lnTo>
+                    <a:pt x="5300066" y="2719727"/>
+                  </a:lnTo>
+                  <a:lnTo>
+                    <a:pt x="5371689" y="2721861"/>
+                  </a:lnTo>
+                  <a:lnTo>
+                    <a:pt x="5443311" y="2723990"/>
+                  </a:lnTo>
+                  <a:lnTo>
+                    <a:pt x="5514934" y="2726113"/>
+                  </a:lnTo>
+                  <a:lnTo>
+                    <a:pt x="5586557" y="2728229"/>
+                  </a:lnTo>
+                  <a:lnTo>
+                    <a:pt x="5658179" y="2730340"/>
+                  </a:lnTo>
+                  <a:lnTo>
+                    <a:pt x="5729802" y="2732445"/>
+                  </a:lnTo>
+                  <a:lnTo>
+                    <a:pt x="5801424" y="2734544"/>
+                  </a:lnTo>
+                  <a:lnTo>
+                    <a:pt x="5873047" y="2736637"/>
+                  </a:lnTo>
+                  <a:lnTo>
+                    <a:pt x="5944669" y="2738725"/>
+                  </a:lnTo>
+                  <a:lnTo>
+                    <a:pt x="6016292" y="2740806"/>
+                  </a:lnTo>
+                  <a:lnTo>
+                    <a:pt x="6087914" y="2742882"/>
+                  </a:lnTo>
+                  <a:lnTo>
+                    <a:pt x="6159537" y="2744952"/>
+                  </a:lnTo>
+                  <a:lnTo>
+                    <a:pt x="6231159" y="2747016"/>
+                  </a:lnTo>
+                  <a:lnTo>
+                    <a:pt x="6302782" y="2749074"/>
+                  </a:lnTo>
+                  <a:lnTo>
+                    <a:pt x="6374404" y="2751127"/>
+                  </a:lnTo>
+                  <a:lnTo>
+                    <a:pt x="6446027" y="2753174"/>
+                  </a:lnTo>
+                  <a:lnTo>
+                    <a:pt x="6517649" y="2755215"/>
+                  </a:lnTo>
+                  <a:lnTo>
+                    <a:pt x="6589272" y="2757250"/>
+                  </a:lnTo>
+                  <a:lnTo>
+                    <a:pt x="6660894" y="2759280"/>
+                  </a:lnTo>
+                  <a:lnTo>
+                    <a:pt x="6732517" y="2761304"/>
+                  </a:lnTo>
+                  <a:lnTo>
+                    <a:pt x="6804139" y="2763322"/>
+                  </a:lnTo>
+                  <a:lnTo>
+                    <a:pt x="6875762" y="2765335"/>
+                  </a:lnTo>
+                  <a:lnTo>
+                    <a:pt x="6947385" y="2767342"/>
+                  </a:lnTo>
+                  <a:lnTo>
+                    <a:pt x="7019007" y="2769344"/>
+                  </a:lnTo>
+                  <a:lnTo>
+                    <a:pt x="7090630" y="2771340"/>
+                  </a:lnTo>
+                  <a:lnTo>
+                    <a:pt x="7090630" y="3395846"/>
+                  </a:lnTo>
+                  <a:lnTo>
+                    <a:pt x="7019007" y="3392142"/>
+                  </a:lnTo>
+                  <a:lnTo>
+                    <a:pt x="6947385" y="3388281"/>
+                  </a:lnTo>
+                  <a:lnTo>
+                    <a:pt x="6875762" y="3384258"/>
+                  </a:lnTo>
+                  <a:lnTo>
+                    <a:pt x="6804139" y="3380065"/>
+                  </a:lnTo>
+                  <a:lnTo>
+                    <a:pt x="6732517" y="3375696"/>
+                  </a:lnTo>
+                  <a:lnTo>
+                    <a:pt x="6660894" y="3371142"/>
+                  </a:lnTo>
+                  <a:lnTo>
+                    <a:pt x="6589272" y="3366397"/>
+                  </a:lnTo>
+                  <a:lnTo>
+                    <a:pt x="6517649" y="3361451"/>
+                  </a:lnTo>
+                  <a:lnTo>
+                    <a:pt x="6446027" y="3356297"/>
+                  </a:lnTo>
+                  <a:lnTo>
+                    <a:pt x="6374404" y="3350926"/>
+                  </a:lnTo>
+                  <a:lnTo>
+                    <a:pt x="6302782" y="3345329"/>
+                  </a:lnTo>
+                  <a:lnTo>
+                    <a:pt x="6231159" y="3339495"/>
+                  </a:lnTo>
+                  <a:lnTo>
+                    <a:pt x="6159537" y="3333416"/>
+                  </a:lnTo>
+                  <a:lnTo>
+                    <a:pt x="6087914" y="3327081"/>
+                  </a:lnTo>
+                  <a:lnTo>
+                    <a:pt x="6016292" y="3320479"/>
+                  </a:lnTo>
+                  <a:lnTo>
+                    <a:pt x="5944669" y="3313598"/>
+                  </a:lnTo>
+                  <a:lnTo>
+                    <a:pt x="5873047" y="3306427"/>
+                  </a:lnTo>
+                  <a:lnTo>
+                    <a:pt x="5801424" y="3298954"/>
+                  </a:lnTo>
+                  <a:lnTo>
+                    <a:pt x="5729802" y="3291167"/>
+                  </a:lnTo>
+                  <a:lnTo>
+                    <a:pt x="5658179" y="3283051"/>
+                  </a:lnTo>
+                  <a:lnTo>
+                    <a:pt x="5586557" y="3274593"/>
+                  </a:lnTo>
+                  <a:lnTo>
+                    <a:pt x="5514934" y="3265778"/>
+                  </a:lnTo>
+                  <a:lnTo>
+                    <a:pt x="5443311" y="3256593"/>
+                  </a:lnTo>
+                  <a:lnTo>
+                    <a:pt x="5371689" y="3247020"/>
+                  </a:lnTo>
+                  <a:lnTo>
+                    <a:pt x="5300066" y="3237043"/>
+                  </a:lnTo>
+                  <a:lnTo>
+                    <a:pt x="5228444" y="3226646"/>
+                  </a:lnTo>
+                  <a:lnTo>
+                    <a:pt x="5156821" y="3215811"/>
+                  </a:lnTo>
+                  <a:lnTo>
+                    <a:pt x="5085199" y="3204520"/>
+                  </a:lnTo>
+                  <a:lnTo>
+                    <a:pt x="5013576" y="3192752"/>
+                  </a:lnTo>
+                  <a:lnTo>
+                    <a:pt x="4941954" y="3180489"/>
+                  </a:lnTo>
+                  <a:lnTo>
+                    <a:pt x="4870331" y="3167708"/>
+                  </a:lnTo>
+                  <a:lnTo>
+                    <a:pt x="4798709" y="3154390"/>
+                  </a:lnTo>
+                  <a:lnTo>
+                    <a:pt x="4727086" y="3140509"/>
+                  </a:lnTo>
+                  <a:lnTo>
+                    <a:pt x="4655464" y="3126044"/>
+                  </a:lnTo>
+                  <a:lnTo>
+                    <a:pt x="4583841" y="3110970"/>
+                  </a:lnTo>
+                  <a:lnTo>
+                    <a:pt x="4512219" y="3095259"/>
+                  </a:lnTo>
+                  <a:lnTo>
+                    <a:pt x="4440596" y="3078887"/>
+                  </a:lnTo>
+                  <a:lnTo>
+                    <a:pt x="4368974" y="3061825"/>
+                  </a:lnTo>
+                  <a:lnTo>
+                    <a:pt x="4297351" y="3044044"/>
+                  </a:lnTo>
+                  <a:lnTo>
+                    <a:pt x="4225729" y="3025514"/>
+                  </a:lnTo>
+                  <a:lnTo>
+                    <a:pt x="4154106" y="3006202"/>
+                  </a:lnTo>
+                  <a:lnTo>
+                    <a:pt x="4082483" y="2986077"/>
+                  </a:lnTo>
+                  <a:lnTo>
+                    <a:pt x="4010861" y="2965104"/>
+                  </a:lnTo>
+                  <a:lnTo>
+                    <a:pt x="3939238" y="2943246"/>
+                  </a:lnTo>
+                  <a:lnTo>
+                    <a:pt x="3867616" y="2920468"/>
+                  </a:lnTo>
+                  <a:lnTo>
+                    <a:pt x="3795993" y="2896730"/>
+                  </a:lnTo>
+                  <a:lnTo>
+                    <a:pt x="3724371" y="2871991"/>
+                  </a:lnTo>
+                  <a:lnTo>
+                    <a:pt x="3652748" y="2846210"/>
+                  </a:lnTo>
+                  <a:lnTo>
+                    <a:pt x="3581126" y="2819342"/>
+                  </a:lnTo>
+                  <a:lnTo>
+                    <a:pt x="3509503" y="2791341"/>
+                  </a:lnTo>
+                  <a:lnTo>
+                    <a:pt x="3437881" y="2762161"/>
+                  </a:lnTo>
+                  <a:lnTo>
+                    <a:pt x="3366258" y="2731751"/>
+                  </a:lnTo>
+                  <a:lnTo>
+                    <a:pt x="3294636" y="2700060"/>
+                  </a:lnTo>
+                  <a:lnTo>
+                    <a:pt x="3223013" y="2667033"/>
+                  </a:lnTo>
+                  <a:lnTo>
+                    <a:pt x="3151391" y="2652832"/>
+                  </a:lnTo>
+                  <a:lnTo>
+                    <a:pt x="3079768" y="2650504"/>
+                  </a:lnTo>
+                  <a:lnTo>
+                    <a:pt x="3008146" y="2648169"/>
+                  </a:lnTo>
+                  <a:lnTo>
+                    <a:pt x="2936523" y="2645828"/>
+                  </a:lnTo>
+                  <a:lnTo>
+                    <a:pt x="2864901" y="2643481"/>
+                  </a:lnTo>
+                  <a:lnTo>
+                    <a:pt x="2793278" y="2641127"/>
+                  </a:lnTo>
+                  <a:lnTo>
+                    <a:pt x="2721655" y="2638766"/>
+                  </a:lnTo>
+                  <a:lnTo>
+                    <a:pt x="2650033" y="2636398"/>
+                  </a:lnTo>
+                  <a:lnTo>
+                    <a:pt x="2578410" y="2634024"/>
+                  </a:lnTo>
+                  <a:lnTo>
+                    <a:pt x="2506788" y="2631644"/>
+                  </a:lnTo>
+                  <a:lnTo>
+                    <a:pt x="2435165" y="2629256"/>
+                  </a:lnTo>
+                  <a:lnTo>
+                    <a:pt x="2363543" y="2626862"/>
+                  </a:lnTo>
+                  <a:lnTo>
+                    <a:pt x="2291920" y="2624462"/>
+                  </a:lnTo>
+                  <a:lnTo>
+                    <a:pt x="2220298" y="2622054"/>
+                  </a:lnTo>
+                  <a:lnTo>
+                    <a:pt x="2148675" y="2619640"/>
+                  </a:lnTo>
+                  <a:lnTo>
+                    <a:pt x="2077053" y="2617219"/>
+                  </a:lnTo>
+                  <a:lnTo>
+                    <a:pt x="2005430" y="2614791"/>
+                  </a:lnTo>
+                  <a:lnTo>
+                    <a:pt x="1933808" y="2612357"/>
+                  </a:lnTo>
+                  <a:lnTo>
+                    <a:pt x="1862185" y="2609915"/>
+                  </a:lnTo>
+                  <a:lnTo>
+                    <a:pt x="1790563" y="2607467"/>
+                  </a:lnTo>
+                  <a:lnTo>
+                    <a:pt x="1718940" y="2605012"/>
+                  </a:lnTo>
+                  <a:lnTo>
+                    <a:pt x="1647318" y="2602550"/>
+                  </a:lnTo>
+                  <a:lnTo>
+                    <a:pt x="1575695" y="2600081"/>
+                  </a:lnTo>
+                  <a:lnTo>
+                    <a:pt x="1504073" y="2597605"/>
+                  </a:lnTo>
+                  <a:lnTo>
+                    <a:pt x="1432450" y="2595123"/>
+                  </a:lnTo>
+                  <a:lnTo>
+                    <a:pt x="1360827" y="2592633"/>
+                  </a:lnTo>
+                  <a:lnTo>
+                    <a:pt x="1289205" y="2590136"/>
+                  </a:lnTo>
+                  <a:lnTo>
+                    <a:pt x="1217582" y="2587633"/>
+                  </a:lnTo>
+                  <a:lnTo>
+                    <a:pt x="1145960" y="2585122"/>
+                  </a:lnTo>
+                  <a:lnTo>
+                    <a:pt x="1074337" y="2582604"/>
+                  </a:lnTo>
+                  <a:lnTo>
+                    <a:pt x="1002715" y="2580080"/>
+                  </a:lnTo>
+                  <a:lnTo>
+                    <a:pt x="931092" y="2577548"/>
+                  </a:lnTo>
+                  <a:lnTo>
+                    <a:pt x="859470" y="2575009"/>
+                  </a:lnTo>
+                  <a:lnTo>
+                    <a:pt x="787847" y="2572463"/>
+                  </a:lnTo>
+                  <a:lnTo>
+                    <a:pt x="716225" y="2569910"/>
+                  </a:lnTo>
+                  <a:lnTo>
+                    <a:pt x="644602" y="2567350"/>
+                  </a:lnTo>
+                  <a:lnTo>
+                    <a:pt x="572980" y="2564782"/>
+                  </a:lnTo>
+                  <a:lnTo>
+                    <a:pt x="501357" y="2562207"/>
+                  </a:lnTo>
+                  <a:lnTo>
+                    <a:pt x="429735" y="2559626"/>
+                  </a:lnTo>
+                  <a:lnTo>
+                    <a:pt x="358112" y="2557036"/>
+                  </a:lnTo>
+                  <a:lnTo>
+                    <a:pt x="286490" y="2554440"/>
+                  </a:lnTo>
+                  <a:lnTo>
+                    <a:pt x="214867" y="2551836"/>
+                  </a:lnTo>
+                  <a:lnTo>
+                    <a:pt x="143245" y="2549226"/>
+                  </a:lnTo>
+                  <a:lnTo>
+                    <a:pt x="71622" y="2546607"/>
+                  </a:lnTo>
+                  <a:lnTo>
+                    <a:pt x="0" y="2543982"/>
                   </a:lnTo>
                   <a:close/>
                 </a:path>
@@ -3993,285 +3993,285 @@
           </p:nvSpPr>
           <p:spPr>
             <a:xfrm>
-              <a:off x="1877065" y="2073503"/>
-              <a:ext cx="6385614" cy="2782546"/>
+              <a:off x="1878394" y="2073503"/>
+              <a:ext cx="6384284" cy="2771340"/>
             </a:xfrm>
             <a:custGeom>
               <a:avLst/>
               <a:pathLst>
-                <a:path w="6385614" h="2782546">
+                <a:path w="6384284" h="2771340">
                   <a:moveTo>
                     <a:pt x="0" y="0"/>
                   </a:moveTo>
                   <a:lnTo>
-                    <a:pt x="11209" y="22854"/>
-                  </a:lnTo>
-                  <a:lnTo>
-                    <a:pt x="82831" y="162972"/>
-                  </a:lnTo>
-                  <a:lnTo>
-                    <a:pt x="154454" y="297417"/>
-                  </a:lnTo>
-                  <a:lnTo>
-                    <a:pt x="226076" y="426418"/>
-                  </a:lnTo>
-                  <a:lnTo>
-                    <a:pt x="297699" y="550198"/>
-                  </a:lnTo>
-                  <a:lnTo>
-                    <a:pt x="369321" y="668965"/>
-                  </a:lnTo>
-                  <a:lnTo>
-                    <a:pt x="440944" y="782925"/>
-                  </a:lnTo>
-                  <a:lnTo>
-                    <a:pt x="512566" y="892270"/>
-                  </a:lnTo>
-                  <a:lnTo>
-                    <a:pt x="584189" y="997189"/>
-                  </a:lnTo>
-                  <a:lnTo>
-                    <a:pt x="655811" y="1097860"/>
-                  </a:lnTo>
-                  <a:lnTo>
-                    <a:pt x="727434" y="1194455"/>
-                  </a:lnTo>
-                  <a:lnTo>
-                    <a:pt x="799056" y="1287139"/>
-                  </a:lnTo>
-                  <a:lnTo>
-                    <a:pt x="870679" y="1376071"/>
-                  </a:lnTo>
-                  <a:lnTo>
-                    <a:pt x="942302" y="1461402"/>
-                  </a:lnTo>
-                  <a:lnTo>
-                    <a:pt x="1013924" y="1543279"/>
-                  </a:lnTo>
-                  <a:lnTo>
-                    <a:pt x="1085547" y="1621841"/>
-                  </a:lnTo>
-                  <a:lnTo>
-                    <a:pt x="1157169" y="1697222"/>
-                  </a:lnTo>
-                  <a:lnTo>
-                    <a:pt x="1228792" y="1769551"/>
-                  </a:lnTo>
-                  <a:lnTo>
-                    <a:pt x="1300414" y="1838952"/>
-                  </a:lnTo>
-                  <a:lnTo>
-                    <a:pt x="1372037" y="1905544"/>
-                  </a:lnTo>
-                  <a:lnTo>
-                    <a:pt x="1443659" y="1969439"/>
-                  </a:lnTo>
-                  <a:lnTo>
-                    <a:pt x="1515282" y="2030747"/>
-                  </a:lnTo>
-                  <a:lnTo>
-                    <a:pt x="1586904" y="2089573"/>
-                  </a:lnTo>
-                  <a:lnTo>
-                    <a:pt x="1658527" y="2146018"/>
-                  </a:lnTo>
-                  <a:lnTo>
-                    <a:pt x="1730149" y="2200177"/>
-                  </a:lnTo>
-                  <a:lnTo>
-                    <a:pt x="1801772" y="2252144"/>
-                  </a:lnTo>
-                  <a:lnTo>
-                    <a:pt x="1873394" y="2302006"/>
-                  </a:lnTo>
-                  <a:lnTo>
-                    <a:pt x="1945017" y="2349850"/>
-                  </a:lnTo>
-                  <a:lnTo>
-                    <a:pt x="2016639" y="2395757"/>
-                  </a:lnTo>
-                  <a:lnTo>
-                    <a:pt x="2088262" y="2439806"/>
-                  </a:lnTo>
-                  <a:lnTo>
-                    <a:pt x="2159884" y="2482071"/>
-                  </a:lnTo>
-                  <a:lnTo>
-                    <a:pt x="2231507" y="2522625"/>
-                  </a:lnTo>
-                  <a:lnTo>
-                    <a:pt x="2303130" y="2561537"/>
-                  </a:lnTo>
-                  <a:lnTo>
-                    <a:pt x="2374752" y="2598873"/>
-                  </a:lnTo>
-                  <a:lnTo>
-                    <a:pt x="2446375" y="2634698"/>
-                  </a:lnTo>
-                  <a:lnTo>
-                    <a:pt x="2517997" y="2655396"/>
-                  </a:lnTo>
-                  <a:lnTo>
-                    <a:pt x="2589620" y="2657949"/>
-                  </a:lnTo>
-                  <a:lnTo>
-                    <a:pt x="2661242" y="2660493"/>
-                  </a:lnTo>
-                  <a:lnTo>
-                    <a:pt x="2732865" y="2663030"/>
-                  </a:lnTo>
-                  <a:lnTo>
-                    <a:pt x="2804487" y="2665559"/>
-                  </a:lnTo>
-                  <a:lnTo>
-                    <a:pt x="2876110" y="2668080"/>
-                  </a:lnTo>
-                  <a:lnTo>
-                    <a:pt x="2947732" y="2670593"/>
-                  </a:lnTo>
-                  <a:lnTo>
-                    <a:pt x="3019355" y="2673098"/>
-                  </a:lnTo>
-                  <a:lnTo>
-                    <a:pt x="3090977" y="2675596"/>
-                  </a:lnTo>
-                  <a:lnTo>
-                    <a:pt x="3162600" y="2678086"/>
-                  </a:lnTo>
-                  <a:lnTo>
-                    <a:pt x="3234222" y="2680569"/>
-                  </a:lnTo>
-                  <a:lnTo>
-                    <a:pt x="3305845" y="2683043"/>
-                  </a:lnTo>
-                  <a:lnTo>
-                    <a:pt x="3377467" y="2685510"/>
-                  </a:lnTo>
-                  <a:lnTo>
-                    <a:pt x="3449090" y="2687970"/>
-                  </a:lnTo>
-                  <a:lnTo>
-                    <a:pt x="3520712" y="2690422"/>
-                  </a:lnTo>
-                  <a:lnTo>
-                    <a:pt x="3592335" y="2692866"/>
-                  </a:lnTo>
-                  <a:lnTo>
-                    <a:pt x="3663958" y="2695303"/>
-                  </a:lnTo>
-                  <a:lnTo>
-                    <a:pt x="3735580" y="2697732"/>
-                  </a:lnTo>
-                  <a:lnTo>
-                    <a:pt x="3807203" y="2700154"/>
-                  </a:lnTo>
-                  <a:lnTo>
-                    <a:pt x="3878825" y="2702569"/>
-                  </a:lnTo>
-                  <a:lnTo>
-                    <a:pt x="3950448" y="2704976"/>
-                  </a:lnTo>
-                  <a:lnTo>
-                    <a:pt x="4022070" y="2707375"/>
-                  </a:lnTo>
-                  <a:lnTo>
-                    <a:pt x="4093693" y="2709767"/>
-                  </a:lnTo>
-                  <a:lnTo>
-                    <a:pt x="4165315" y="2712152"/>
-                  </a:lnTo>
-                  <a:lnTo>
-                    <a:pt x="4236938" y="2714530"/>
-                  </a:lnTo>
-                  <a:lnTo>
-                    <a:pt x="4308560" y="2716900"/>
-                  </a:lnTo>
-                  <a:lnTo>
-                    <a:pt x="4380183" y="2719262"/>
-                  </a:lnTo>
-                  <a:lnTo>
-                    <a:pt x="4451805" y="2721618"/>
-                  </a:lnTo>
-                  <a:lnTo>
-                    <a:pt x="4523428" y="2723966"/>
-                  </a:lnTo>
-                  <a:lnTo>
-                    <a:pt x="4595050" y="2726307"/>
-                  </a:lnTo>
-                  <a:lnTo>
-                    <a:pt x="4666673" y="2728641"/>
-                  </a:lnTo>
-                  <a:lnTo>
-                    <a:pt x="4738295" y="2730968"/>
-                  </a:lnTo>
-                  <a:lnTo>
-                    <a:pt x="4809918" y="2733287"/>
-                  </a:lnTo>
-                  <a:lnTo>
-                    <a:pt x="4881540" y="2735600"/>
-                  </a:lnTo>
-                  <a:lnTo>
-                    <a:pt x="4953163" y="2737905"/>
-                  </a:lnTo>
-                  <a:lnTo>
-                    <a:pt x="5024786" y="2740203"/>
-                  </a:lnTo>
-                  <a:lnTo>
-                    <a:pt x="5096408" y="2742494"/>
-                  </a:lnTo>
-                  <a:lnTo>
-                    <a:pt x="5168031" y="2744778"/>
-                  </a:lnTo>
-                  <a:lnTo>
-                    <a:pt x="5239653" y="2747055"/>
-                  </a:lnTo>
-                  <a:lnTo>
-                    <a:pt x="5311276" y="2749325"/>
-                  </a:lnTo>
-                  <a:lnTo>
-                    <a:pt x="5382898" y="2751587"/>
-                  </a:lnTo>
-                  <a:lnTo>
-                    <a:pt x="5454521" y="2753843"/>
-                  </a:lnTo>
-                  <a:lnTo>
-                    <a:pt x="5526143" y="2756092"/>
-                  </a:lnTo>
-                  <a:lnTo>
-                    <a:pt x="5597766" y="2758334"/>
-                  </a:lnTo>
-                  <a:lnTo>
-                    <a:pt x="5669388" y="2760570"/>
-                  </a:lnTo>
-                  <a:lnTo>
-                    <a:pt x="5741011" y="2762798"/>
-                  </a:lnTo>
-                  <a:lnTo>
-                    <a:pt x="5812633" y="2765019"/>
-                  </a:lnTo>
-                  <a:lnTo>
-                    <a:pt x="5884256" y="2767234"/>
-                  </a:lnTo>
-                  <a:lnTo>
-                    <a:pt x="5955878" y="2769441"/>
-                  </a:lnTo>
-                  <a:lnTo>
-                    <a:pt x="6027501" y="2771642"/>
-                  </a:lnTo>
-                  <a:lnTo>
-                    <a:pt x="6099123" y="2773836"/>
-                  </a:lnTo>
-                  <a:lnTo>
-                    <a:pt x="6170746" y="2776024"/>
-                  </a:lnTo>
-                  <a:lnTo>
-                    <a:pt x="6242368" y="2778204"/>
-                  </a:lnTo>
-                  <a:lnTo>
-                    <a:pt x="6313991" y="2780378"/>
-                  </a:lnTo>
-                  <a:lnTo>
-                    <a:pt x="6385614" y="2782546"/>
+                    <a:pt x="9880" y="20135"/>
+                  </a:lnTo>
+                  <a:lnTo>
+                    <a:pt x="81502" y="160200"/>
+                  </a:lnTo>
+                  <a:lnTo>
+                    <a:pt x="153125" y="294601"/>
+                  </a:lnTo>
+                  <a:lnTo>
+                    <a:pt x="224747" y="423567"/>
+                  </a:lnTo>
+                  <a:lnTo>
+                    <a:pt x="296370" y="547317"/>
+                  </a:lnTo>
+                  <a:lnTo>
+                    <a:pt x="367992" y="666064"/>
+                  </a:lnTo>
+                  <a:lnTo>
+                    <a:pt x="439615" y="780008"/>
+                  </a:lnTo>
+                  <a:lnTo>
+                    <a:pt x="511237" y="889344"/>
+                  </a:lnTo>
+                  <a:lnTo>
+                    <a:pt x="582860" y="994259"/>
+                  </a:lnTo>
+                  <a:lnTo>
+                    <a:pt x="654482" y="1094932"/>
+                  </a:lnTo>
+                  <a:lnTo>
+                    <a:pt x="726105" y="1191533"/>
+                  </a:lnTo>
+                  <a:lnTo>
+                    <a:pt x="797727" y="1284228"/>
+                  </a:lnTo>
+                  <a:lnTo>
+                    <a:pt x="869350" y="1373174"/>
+                  </a:lnTo>
+                  <a:lnTo>
+                    <a:pt x="940972" y="1458524"/>
+                  </a:lnTo>
+                  <a:lnTo>
+                    <a:pt x="1012595" y="1540422"/>
+                  </a:lnTo>
+                  <a:lnTo>
+                    <a:pt x="1084217" y="1619008"/>
+                  </a:lnTo>
+                  <a:lnTo>
+                    <a:pt x="1155840" y="1694416"/>
+                  </a:lnTo>
+                  <a:lnTo>
+                    <a:pt x="1227462" y="1766775"/>
+                  </a:lnTo>
+                  <a:lnTo>
+                    <a:pt x="1299085" y="1836207"/>
+                  </a:lnTo>
+                  <a:lnTo>
+                    <a:pt x="1370708" y="1902832"/>
+                  </a:lnTo>
+                  <a:lnTo>
+                    <a:pt x="1442330" y="1966763"/>
+                  </a:lnTo>
+                  <a:lnTo>
+                    <a:pt x="1513953" y="2028108"/>
+                  </a:lnTo>
+                  <a:lnTo>
+                    <a:pt x="1585575" y="2086972"/>
+                  </a:lnTo>
+                  <a:lnTo>
+                    <a:pt x="1657198" y="2143457"/>
+                  </a:lnTo>
+                  <a:lnTo>
+                    <a:pt x="1728820" y="2197657"/>
+                  </a:lnTo>
+                  <a:lnTo>
+                    <a:pt x="1800443" y="2249665"/>
+                  </a:lnTo>
+                  <a:lnTo>
+                    <a:pt x="1872065" y="2299570"/>
+                  </a:lnTo>
+                  <a:lnTo>
+                    <a:pt x="1943688" y="2347457"/>
+                  </a:lnTo>
+                  <a:lnTo>
+                    <a:pt x="2015310" y="2393407"/>
+                  </a:lnTo>
+                  <a:lnTo>
+                    <a:pt x="2086933" y="2437499"/>
+                  </a:lnTo>
+                  <a:lnTo>
+                    <a:pt x="2158555" y="2479809"/>
+                  </a:lnTo>
+                  <a:lnTo>
+                    <a:pt x="2230178" y="2520407"/>
+                  </a:lnTo>
+                  <a:lnTo>
+                    <a:pt x="2301800" y="2559363"/>
+                  </a:lnTo>
+                  <a:lnTo>
+                    <a:pt x="2373423" y="2596744"/>
+                  </a:lnTo>
+                  <a:lnTo>
+                    <a:pt x="2445045" y="2632614"/>
+                  </a:lnTo>
+                  <a:lnTo>
+                    <a:pt x="2516668" y="2655153"/>
+                  </a:lnTo>
+                  <a:lnTo>
+                    <a:pt x="2588290" y="2657468"/>
+                  </a:lnTo>
+                  <a:lnTo>
+                    <a:pt x="2659913" y="2659777"/>
+                  </a:lnTo>
+                  <a:lnTo>
+                    <a:pt x="2731536" y="2662079"/>
+                  </a:lnTo>
+                  <a:lnTo>
+                    <a:pt x="2803158" y="2664374"/>
+                  </a:lnTo>
+                  <a:lnTo>
+                    <a:pt x="2874781" y="2666664"/>
+                  </a:lnTo>
+                  <a:lnTo>
+                    <a:pt x="2946403" y="2668947"/>
+                  </a:lnTo>
+                  <a:lnTo>
+                    <a:pt x="3018026" y="2671223"/>
+                  </a:lnTo>
+                  <a:lnTo>
+                    <a:pt x="3089648" y="2673493"/>
+                  </a:lnTo>
+                  <a:lnTo>
+                    <a:pt x="3161271" y="2675757"/>
+                  </a:lnTo>
+                  <a:lnTo>
+                    <a:pt x="3232893" y="2678014"/>
+                  </a:lnTo>
+                  <a:lnTo>
+                    <a:pt x="3304516" y="2680265"/>
+                  </a:lnTo>
+                  <a:lnTo>
+                    <a:pt x="3376138" y="2682510"/>
+                  </a:lnTo>
+                  <a:lnTo>
+                    <a:pt x="3447761" y="2684749"/>
+                  </a:lnTo>
+                  <a:lnTo>
+                    <a:pt x="3519383" y="2686981"/>
+                  </a:lnTo>
+                  <a:lnTo>
+                    <a:pt x="3591006" y="2689207"/>
+                  </a:lnTo>
+                  <a:lnTo>
+                    <a:pt x="3662628" y="2691427"/>
+                  </a:lnTo>
+                  <a:lnTo>
+                    <a:pt x="3734251" y="2693641"/>
+                  </a:lnTo>
+                  <a:lnTo>
+                    <a:pt x="3805873" y="2695848"/>
+                  </a:lnTo>
+                  <a:lnTo>
+                    <a:pt x="3877496" y="2698049"/>
+                  </a:lnTo>
+                  <a:lnTo>
+                    <a:pt x="3949118" y="2700244"/>
+                  </a:lnTo>
+                  <a:lnTo>
+                    <a:pt x="4020741" y="2702433"/>
+                  </a:lnTo>
+                  <a:lnTo>
+                    <a:pt x="4092364" y="2704616"/>
+                  </a:lnTo>
+                  <a:lnTo>
+                    <a:pt x="4163986" y="2706793"/>
+                  </a:lnTo>
+                  <a:lnTo>
+                    <a:pt x="4235609" y="2708964"/>
+                  </a:lnTo>
+                  <a:lnTo>
+                    <a:pt x="4307231" y="2711128"/>
+                  </a:lnTo>
+                  <a:lnTo>
+                    <a:pt x="4378854" y="2713287"/>
+                  </a:lnTo>
+                  <a:lnTo>
+                    <a:pt x="4450476" y="2715440"/>
+                  </a:lnTo>
+                  <a:lnTo>
+                    <a:pt x="4522099" y="2717586"/>
+                  </a:lnTo>
+                  <a:lnTo>
+                    <a:pt x="4593721" y="2719727"/>
+                  </a:lnTo>
+                  <a:lnTo>
+                    <a:pt x="4665344" y="2721861"/>
+                  </a:lnTo>
+                  <a:lnTo>
+                    <a:pt x="4736966" y="2723990"/>
+                  </a:lnTo>
+                  <a:lnTo>
+                    <a:pt x="4808589" y="2726113"/>
+                  </a:lnTo>
+                  <a:lnTo>
+                    <a:pt x="4880211" y="2728229"/>
+                  </a:lnTo>
+                  <a:lnTo>
+                    <a:pt x="4951834" y="2730340"/>
+                  </a:lnTo>
+                  <a:lnTo>
+                    <a:pt x="5023456" y="2732445"/>
+                  </a:lnTo>
+                  <a:lnTo>
+                    <a:pt x="5095079" y="2734544"/>
+                  </a:lnTo>
+                  <a:lnTo>
+                    <a:pt x="5166701" y="2736637"/>
+                  </a:lnTo>
+                  <a:lnTo>
+                    <a:pt x="5238324" y="2738725"/>
+                  </a:lnTo>
+                  <a:lnTo>
+                    <a:pt x="5309946" y="2740806"/>
+                  </a:lnTo>
+                  <a:lnTo>
+                    <a:pt x="5381569" y="2742882"/>
+                  </a:lnTo>
+                  <a:lnTo>
+                    <a:pt x="5453192" y="2744952"/>
+                  </a:lnTo>
+                  <a:lnTo>
+                    <a:pt x="5524814" y="2747016"/>
+                  </a:lnTo>
+                  <a:lnTo>
+                    <a:pt x="5596437" y="2749074"/>
+                  </a:lnTo>
+                  <a:lnTo>
+                    <a:pt x="5668059" y="2751127"/>
+                  </a:lnTo>
+                  <a:lnTo>
+                    <a:pt x="5739682" y="2753174"/>
+                  </a:lnTo>
+                  <a:lnTo>
+                    <a:pt x="5811304" y="2755215"/>
+                  </a:lnTo>
+                  <a:lnTo>
+                    <a:pt x="5882927" y="2757250"/>
+                  </a:lnTo>
+                  <a:lnTo>
+                    <a:pt x="5954549" y="2759280"/>
+                  </a:lnTo>
+                  <a:lnTo>
+                    <a:pt x="6026172" y="2761304"/>
+                  </a:lnTo>
+                  <a:lnTo>
+                    <a:pt x="6097794" y="2763322"/>
+                  </a:lnTo>
+                  <a:lnTo>
+                    <a:pt x="6169417" y="2765335"/>
+                  </a:lnTo>
+                  <a:lnTo>
+                    <a:pt x="6241039" y="2767342"/>
+                  </a:lnTo>
+                  <a:lnTo>
+                    <a:pt x="6312662" y="2769344"/>
+                  </a:lnTo>
+                  <a:lnTo>
+                    <a:pt x="6384284" y="2771340"/>
                   </a:lnTo>
                 </a:path>
               </a:pathLst>
@@ -4291,309 +4291,309 @@
           </p:nvSpPr>
           <p:spPr>
             <a:xfrm>
-              <a:off x="1172049" y="4605498"/>
-              <a:ext cx="7090630" cy="864302"/>
+              <a:off x="1172049" y="4617485"/>
+              <a:ext cx="7090630" cy="851864"/>
             </a:xfrm>
             <a:custGeom>
               <a:avLst/>
               <a:pathLst>
-                <a:path w="7090630" h="864302">
+                <a:path w="7090630" h="851864">
                   <a:moveTo>
-                    <a:pt x="7090630" y="864302"/>
+                    <a:pt x="7090630" y="851864"/>
                   </a:moveTo>
                   <a:lnTo>
-                    <a:pt x="7019007" y="860612"/>
-                  </a:lnTo>
-                  <a:lnTo>
-                    <a:pt x="6947385" y="856766"/>
-                  </a:lnTo>
-                  <a:lnTo>
-                    <a:pt x="6875762" y="852759"/>
-                  </a:lnTo>
-                  <a:lnTo>
-                    <a:pt x="6804139" y="848582"/>
-                  </a:lnTo>
-                  <a:lnTo>
-                    <a:pt x="6732517" y="844229"/>
-                  </a:lnTo>
-                  <a:lnTo>
-                    <a:pt x="6660894" y="839692"/>
-                  </a:lnTo>
-                  <a:lnTo>
-                    <a:pt x="6589272" y="834964"/>
-                  </a:lnTo>
-                  <a:lnTo>
-                    <a:pt x="6517649" y="830036"/>
-                  </a:lnTo>
-                  <a:lnTo>
-                    <a:pt x="6446027" y="824900"/>
-                  </a:lnTo>
-                  <a:lnTo>
-                    <a:pt x="6374404" y="819548"/>
-                  </a:lnTo>
-                  <a:lnTo>
-                    <a:pt x="6302782" y="813970"/>
-                  </a:lnTo>
-                  <a:lnTo>
-                    <a:pt x="6231159" y="808156"/>
-                  </a:lnTo>
-                  <a:lnTo>
-                    <a:pt x="6159537" y="802097"/>
-                  </a:lnTo>
-                  <a:lnTo>
-                    <a:pt x="6087914" y="795783"/>
-                  </a:lnTo>
-                  <a:lnTo>
-                    <a:pt x="6016292" y="789202"/>
-                  </a:lnTo>
-                  <a:lnTo>
-                    <a:pt x="5944669" y="782343"/>
-                  </a:lnTo>
-                  <a:lnTo>
-                    <a:pt x="5873047" y="775195"/>
-                  </a:lnTo>
-                  <a:lnTo>
-                    <a:pt x="5801424" y="767745"/>
-                  </a:lnTo>
-                  <a:lnTo>
-                    <a:pt x="5729802" y="759981"/>
-                  </a:lnTo>
-                  <a:lnTo>
-                    <a:pt x="5658179" y="751890"/>
-                  </a:lnTo>
-                  <a:lnTo>
-                    <a:pt x="5586557" y="743457"/>
-                  </a:lnTo>
-                  <a:lnTo>
-                    <a:pt x="5514934" y="734668"/>
-                  </a:lnTo>
-                  <a:lnTo>
-                    <a:pt x="5443311" y="725508"/>
-                  </a:lnTo>
-                  <a:lnTo>
-                    <a:pt x="5371689" y="715962"/>
-                  </a:lnTo>
-                  <a:lnTo>
-                    <a:pt x="5300066" y="706013"/>
-                  </a:lnTo>
-                  <a:lnTo>
-                    <a:pt x="5228444" y="695644"/>
-                  </a:lnTo>
-                  <a:lnTo>
-                    <a:pt x="5156821" y="684838"/>
-                  </a:lnTo>
-                  <a:lnTo>
-                    <a:pt x="5085199" y="673576"/>
-                  </a:lnTo>
-                  <a:lnTo>
-                    <a:pt x="5013576" y="661839"/>
-                  </a:lnTo>
-                  <a:lnTo>
-                    <a:pt x="4941954" y="649606"/>
-                  </a:lnTo>
-                  <a:lnTo>
-                    <a:pt x="4870331" y="636857"/>
-                  </a:lnTo>
-                  <a:lnTo>
-                    <a:pt x="4798709" y="623571"/>
-                  </a:lnTo>
-                  <a:lnTo>
-                    <a:pt x="4727086" y="609723"/>
-                  </a:lnTo>
-                  <a:lnTo>
-                    <a:pt x="4655464" y="595292"/>
-                  </a:lnTo>
-                  <a:lnTo>
-                    <a:pt x="4583841" y="580251"/>
-                  </a:lnTo>
-                  <a:lnTo>
-                    <a:pt x="4512219" y="564576"/>
-                  </a:lnTo>
-                  <a:lnTo>
-                    <a:pt x="4440596" y="548239"/>
-                  </a:lnTo>
-                  <a:lnTo>
-                    <a:pt x="4368974" y="531213"/>
-                  </a:lnTo>
-                  <a:lnTo>
-                    <a:pt x="4297351" y="513469"/>
-                  </a:lnTo>
-                  <a:lnTo>
-                    <a:pt x="4225729" y="494976"/>
-                  </a:lnTo>
-                  <a:lnTo>
-                    <a:pt x="4154106" y="475703"/>
-                  </a:lnTo>
-                  <a:lnTo>
-                    <a:pt x="4082483" y="455616"/>
-                  </a:lnTo>
-                  <a:lnTo>
-                    <a:pt x="4010861" y="434682"/>
-                  </a:lnTo>
-                  <a:lnTo>
-                    <a:pt x="3939238" y="412865"/>
-                  </a:lnTo>
-                  <a:lnTo>
-                    <a:pt x="3867616" y="390127"/>
-                  </a:lnTo>
-                  <a:lnTo>
-                    <a:pt x="3795993" y="366430"/>
-                  </a:lnTo>
-                  <a:lnTo>
-                    <a:pt x="3724371" y="341733"/>
-                  </a:lnTo>
-                  <a:lnTo>
-                    <a:pt x="3652748" y="315993"/>
-                  </a:lnTo>
-                  <a:lnTo>
-                    <a:pt x="3581126" y="289168"/>
-                  </a:lnTo>
-                  <a:lnTo>
-                    <a:pt x="3509503" y="261211"/>
-                  </a:lnTo>
-                  <a:lnTo>
-                    <a:pt x="3437881" y="232074"/>
-                  </a:lnTo>
-                  <a:lnTo>
-                    <a:pt x="3366258" y="201708"/>
-                  </a:lnTo>
-                  <a:lnTo>
-                    <a:pt x="3294636" y="170060"/>
-                  </a:lnTo>
-                  <a:lnTo>
-                    <a:pt x="3223013" y="137077"/>
-                  </a:lnTo>
-                  <a:lnTo>
-                    <a:pt x="3151391" y="120840"/>
-                  </a:lnTo>
-                  <a:lnTo>
-                    <a:pt x="3079768" y="118272"/>
-                  </a:lnTo>
-                  <a:lnTo>
-                    <a:pt x="3008146" y="115696"/>
-                  </a:lnTo>
-                  <a:lnTo>
-                    <a:pt x="2936523" y="113112"/>
-                  </a:lnTo>
-                  <a:lnTo>
-                    <a:pt x="2864901" y="110520"/>
-                  </a:lnTo>
-                  <a:lnTo>
-                    <a:pt x="2793278" y="107920"/>
-                  </a:lnTo>
-                  <a:lnTo>
-                    <a:pt x="2721655" y="105312"/>
-                  </a:lnTo>
-                  <a:lnTo>
-                    <a:pt x="2650033" y="102696"/>
-                  </a:lnTo>
-                  <a:lnTo>
-                    <a:pt x="2578410" y="100072"/>
-                  </a:lnTo>
-                  <a:lnTo>
-                    <a:pt x="2506788" y="97440"/>
-                  </a:lnTo>
-                  <a:lnTo>
-                    <a:pt x="2435165" y="94799"/>
-                  </a:lnTo>
-                  <a:lnTo>
-                    <a:pt x="2363543" y="92151"/>
-                  </a:lnTo>
-                  <a:lnTo>
-                    <a:pt x="2291920" y="89494"/>
-                  </a:lnTo>
-                  <a:lnTo>
-                    <a:pt x="2220298" y="86829"/>
-                  </a:lnTo>
-                  <a:lnTo>
-                    <a:pt x="2148675" y="84156"/>
-                  </a:lnTo>
-                  <a:lnTo>
-                    <a:pt x="2077053" y="81474"/>
-                  </a:lnTo>
-                  <a:lnTo>
-                    <a:pt x="2005430" y="78784"/>
-                  </a:lnTo>
-                  <a:lnTo>
-                    <a:pt x="1933808" y="76086"/>
-                  </a:lnTo>
-                  <a:lnTo>
-                    <a:pt x="1862185" y="73380"/>
-                  </a:lnTo>
-                  <a:lnTo>
-                    <a:pt x="1790563" y="70665"/>
-                  </a:lnTo>
-                  <a:lnTo>
-                    <a:pt x="1718940" y="67942"/>
-                  </a:lnTo>
-                  <a:lnTo>
-                    <a:pt x="1647318" y="65210"/>
-                  </a:lnTo>
-                  <a:lnTo>
-                    <a:pt x="1575695" y="62470"/>
-                  </a:lnTo>
-                  <a:lnTo>
-                    <a:pt x="1504073" y="59722"/>
-                  </a:lnTo>
-                  <a:lnTo>
-                    <a:pt x="1432450" y="56965"/>
-                  </a:lnTo>
-                  <a:lnTo>
-                    <a:pt x="1360827" y="54199"/>
-                  </a:lnTo>
-                  <a:lnTo>
-                    <a:pt x="1289205" y="51425"/>
-                  </a:lnTo>
-                  <a:lnTo>
-                    <a:pt x="1217582" y="48642"/>
-                  </a:lnTo>
-                  <a:lnTo>
-                    <a:pt x="1145960" y="45851"/>
-                  </a:lnTo>
-                  <a:lnTo>
-                    <a:pt x="1074337" y="43051"/>
-                  </a:lnTo>
-                  <a:lnTo>
-                    <a:pt x="1002715" y="40243"/>
-                  </a:lnTo>
-                  <a:lnTo>
-                    <a:pt x="931092" y="37426"/>
-                  </a:lnTo>
-                  <a:lnTo>
-                    <a:pt x="859470" y="34600"/>
-                  </a:lnTo>
-                  <a:lnTo>
-                    <a:pt x="787847" y="31765"/>
-                  </a:lnTo>
-                  <a:lnTo>
-                    <a:pt x="716225" y="28922"/>
-                  </a:lnTo>
-                  <a:lnTo>
-                    <a:pt x="644602" y="26069"/>
-                  </a:lnTo>
-                  <a:lnTo>
-                    <a:pt x="572980" y="23208"/>
-                  </a:lnTo>
-                  <a:lnTo>
-                    <a:pt x="501357" y="20338"/>
-                  </a:lnTo>
-                  <a:lnTo>
-                    <a:pt x="429735" y="17460"/>
-                  </a:lnTo>
-                  <a:lnTo>
-                    <a:pt x="358112" y="14572"/>
-                  </a:lnTo>
-                  <a:lnTo>
-                    <a:pt x="286490" y="11676"/>
-                  </a:lnTo>
-                  <a:lnTo>
-                    <a:pt x="214867" y="8770"/>
-                  </a:lnTo>
-                  <a:lnTo>
-                    <a:pt x="143245" y="5856"/>
-                  </a:lnTo>
-                  <a:lnTo>
-                    <a:pt x="71622" y="2932"/>
+                    <a:pt x="7019007" y="848160"/>
+                  </a:lnTo>
+                  <a:lnTo>
+                    <a:pt x="6947385" y="844299"/>
+                  </a:lnTo>
+                  <a:lnTo>
+                    <a:pt x="6875762" y="840276"/>
+                  </a:lnTo>
+                  <a:lnTo>
+                    <a:pt x="6804139" y="836083"/>
+                  </a:lnTo>
+                  <a:lnTo>
+                    <a:pt x="6732517" y="831714"/>
+                  </a:lnTo>
+                  <a:lnTo>
+                    <a:pt x="6660894" y="827160"/>
+                  </a:lnTo>
+                  <a:lnTo>
+                    <a:pt x="6589272" y="822415"/>
+                  </a:lnTo>
+                  <a:lnTo>
+                    <a:pt x="6517649" y="817469"/>
+                  </a:lnTo>
+                  <a:lnTo>
+                    <a:pt x="6446027" y="812315"/>
+                  </a:lnTo>
+                  <a:lnTo>
+                    <a:pt x="6374404" y="806944"/>
+                  </a:lnTo>
+                  <a:lnTo>
+                    <a:pt x="6302782" y="801347"/>
+                  </a:lnTo>
+                  <a:lnTo>
+                    <a:pt x="6231159" y="795513"/>
+                  </a:lnTo>
+                  <a:lnTo>
+                    <a:pt x="6159537" y="789434"/>
+                  </a:lnTo>
+                  <a:lnTo>
+                    <a:pt x="6087914" y="783099"/>
+                  </a:lnTo>
+                  <a:lnTo>
+                    <a:pt x="6016292" y="776496"/>
+                  </a:lnTo>
+                  <a:lnTo>
+                    <a:pt x="5944669" y="769616"/>
+                  </a:lnTo>
+                  <a:lnTo>
+                    <a:pt x="5873047" y="762445"/>
+                  </a:lnTo>
+                  <a:lnTo>
+                    <a:pt x="5801424" y="754972"/>
+                  </a:lnTo>
+                  <a:lnTo>
+                    <a:pt x="5729802" y="747185"/>
+                  </a:lnTo>
+                  <a:lnTo>
+                    <a:pt x="5658179" y="739069"/>
+                  </a:lnTo>
+                  <a:lnTo>
+                    <a:pt x="5586557" y="730611"/>
+                  </a:lnTo>
+                  <a:lnTo>
+                    <a:pt x="5514934" y="721796"/>
+                  </a:lnTo>
+                  <a:lnTo>
+                    <a:pt x="5443311" y="712610"/>
+                  </a:lnTo>
+                  <a:lnTo>
+                    <a:pt x="5371689" y="703037"/>
+                  </a:lnTo>
+                  <a:lnTo>
+                    <a:pt x="5300066" y="693061"/>
+                  </a:lnTo>
+                  <a:lnTo>
+                    <a:pt x="5228444" y="682664"/>
+                  </a:lnTo>
+                  <a:lnTo>
+                    <a:pt x="5156821" y="671829"/>
+                  </a:lnTo>
+                  <a:lnTo>
+                    <a:pt x="5085199" y="660537"/>
+                  </a:lnTo>
+                  <a:lnTo>
+                    <a:pt x="5013576" y="648770"/>
+                  </a:lnTo>
+                  <a:lnTo>
+                    <a:pt x="4941954" y="636506"/>
+                  </a:lnTo>
+                  <a:lnTo>
+                    <a:pt x="4870331" y="623726"/>
+                  </a:lnTo>
+                  <a:lnTo>
+                    <a:pt x="4798709" y="610407"/>
+                  </a:lnTo>
+                  <a:lnTo>
+                    <a:pt x="4727086" y="596527"/>
+                  </a:lnTo>
+                  <a:lnTo>
+                    <a:pt x="4655464" y="582062"/>
+                  </a:lnTo>
+                  <a:lnTo>
+                    <a:pt x="4583841" y="566987"/>
+                  </a:lnTo>
+                  <a:lnTo>
+                    <a:pt x="4512219" y="551277"/>
+                  </a:lnTo>
+                  <a:lnTo>
+                    <a:pt x="4440596" y="534905"/>
+                  </a:lnTo>
+                  <a:lnTo>
+                    <a:pt x="4368974" y="517843"/>
+                  </a:lnTo>
+                  <a:lnTo>
+                    <a:pt x="4297351" y="500062"/>
+                  </a:lnTo>
+                  <a:lnTo>
+                    <a:pt x="4225729" y="481532"/>
+                  </a:lnTo>
+                  <a:lnTo>
+                    <a:pt x="4154106" y="462220"/>
+                  </a:lnTo>
+                  <a:lnTo>
+                    <a:pt x="4082483" y="442095"/>
+                  </a:lnTo>
+                  <a:lnTo>
+                    <a:pt x="4010861" y="421121"/>
+                  </a:lnTo>
+                  <a:lnTo>
+                    <a:pt x="3939238" y="399264"/>
+                  </a:lnTo>
+                  <a:lnTo>
+                    <a:pt x="3867616" y="376486"/>
+                  </a:lnTo>
+                  <a:lnTo>
+                    <a:pt x="3795993" y="352747"/>
+                  </a:lnTo>
+                  <a:lnTo>
+                    <a:pt x="3724371" y="328009"/>
+                  </a:lnTo>
+                  <a:lnTo>
+                    <a:pt x="3652748" y="302227"/>
+                  </a:lnTo>
+                  <a:lnTo>
+                    <a:pt x="3581126" y="275359"/>
+                  </a:lnTo>
+                  <a:lnTo>
+                    <a:pt x="3509503" y="247359"/>
+                  </a:lnTo>
+                  <a:lnTo>
+                    <a:pt x="3437881" y="218179"/>
+                  </a:lnTo>
+                  <a:lnTo>
+                    <a:pt x="3366258" y="187769"/>
+                  </a:lnTo>
+                  <a:lnTo>
+                    <a:pt x="3294636" y="156078"/>
+                  </a:lnTo>
+                  <a:lnTo>
+                    <a:pt x="3223013" y="123051"/>
+                  </a:lnTo>
+                  <a:lnTo>
+                    <a:pt x="3151391" y="108850"/>
+                  </a:lnTo>
+                  <a:lnTo>
+                    <a:pt x="3079768" y="106522"/>
+                  </a:lnTo>
+                  <a:lnTo>
+                    <a:pt x="3008146" y="104187"/>
+                  </a:lnTo>
+                  <a:lnTo>
+                    <a:pt x="2936523" y="101846"/>
+                  </a:lnTo>
+                  <a:lnTo>
+                    <a:pt x="2864901" y="99498"/>
+                  </a:lnTo>
+                  <a:lnTo>
+                    <a:pt x="2793278" y="97144"/>
+                  </a:lnTo>
+                  <a:lnTo>
+                    <a:pt x="2721655" y="94784"/>
+                  </a:lnTo>
+                  <a:lnTo>
+                    <a:pt x="2650033" y="92416"/>
+                  </a:lnTo>
+                  <a:lnTo>
+                    <a:pt x="2578410" y="90042"/>
+                  </a:lnTo>
+                  <a:lnTo>
+                    <a:pt x="2506788" y="87661"/>
+                  </a:lnTo>
+                  <a:lnTo>
+                    <a:pt x="2435165" y="85274"/>
+                  </a:lnTo>
+                  <a:lnTo>
+                    <a:pt x="2363543" y="82880"/>
+                  </a:lnTo>
+                  <a:lnTo>
+                    <a:pt x="2291920" y="80479"/>
+                  </a:lnTo>
+                  <a:lnTo>
+                    <a:pt x="2220298" y="78072"/>
+                  </a:lnTo>
+                  <a:lnTo>
+                    <a:pt x="2148675" y="75658"/>
+                  </a:lnTo>
+                  <a:lnTo>
+                    <a:pt x="2077053" y="73237"/>
+                  </a:lnTo>
+                  <a:lnTo>
+                    <a:pt x="2005430" y="70809"/>
+                  </a:lnTo>
+                  <a:lnTo>
+                    <a:pt x="1933808" y="68374"/>
+                  </a:lnTo>
+                  <a:lnTo>
+                    <a:pt x="1862185" y="65933"/>
+                  </a:lnTo>
+                  <a:lnTo>
+                    <a:pt x="1790563" y="63485"/>
+                  </a:lnTo>
+                  <a:lnTo>
+                    <a:pt x="1718940" y="61030"/>
+                  </a:lnTo>
+                  <a:lnTo>
+                    <a:pt x="1647318" y="58568"/>
+                  </a:lnTo>
+                  <a:lnTo>
+                    <a:pt x="1575695" y="56099"/>
+                  </a:lnTo>
+                  <a:lnTo>
+                    <a:pt x="1504073" y="53623"/>
+                  </a:lnTo>
+                  <a:lnTo>
+                    <a:pt x="1432450" y="51141"/>
+                  </a:lnTo>
+                  <a:lnTo>
+                    <a:pt x="1360827" y="48651"/>
+                  </a:lnTo>
+                  <a:lnTo>
+                    <a:pt x="1289205" y="46154"/>
+                  </a:lnTo>
+                  <a:lnTo>
+                    <a:pt x="1217582" y="43651"/>
+                  </a:lnTo>
+                  <a:lnTo>
+                    <a:pt x="1145960" y="41140"/>
+                  </a:lnTo>
+                  <a:lnTo>
+                    <a:pt x="1074337" y="38622"/>
+                  </a:lnTo>
+                  <a:lnTo>
+                    <a:pt x="1002715" y="36098"/>
+                  </a:lnTo>
+                  <a:lnTo>
+                    <a:pt x="931092" y="33566"/>
+                  </a:lnTo>
+                  <a:lnTo>
+                    <a:pt x="859470" y="31027"/>
+                  </a:lnTo>
+                  <a:lnTo>
+                    <a:pt x="787847" y="28481"/>
+                  </a:lnTo>
+                  <a:lnTo>
+                    <a:pt x="716225" y="25928"/>
+                  </a:lnTo>
+                  <a:lnTo>
+                    <a:pt x="644602" y="23367"/>
+                  </a:lnTo>
+                  <a:lnTo>
+                    <a:pt x="572980" y="20800"/>
+                  </a:lnTo>
+                  <a:lnTo>
+                    <a:pt x="501357" y="18225"/>
+                  </a:lnTo>
+                  <a:lnTo>
+                    <a:pt x="429735" y="15643"/>
+                  </a:lnTo>
+                  <a:lnTo>
+                    <a:pt x="358112" y="13054"/>
+                  </a:lnTo>
+                  <a:lnTo>
+                    <a:pt x="286490" y="10458"/>
+                  </a:lnTo>
+                  <a:lnTo>
+                    <a:pt x="214867" y="7854"/>
+                  </a:lnTo>
+                  <a:lnTo>
+                    <a:pt x="143245" y="5243"/>
+                  </a:lnTo>
+                  <a:lnTo>
+                    <a:pt x="71622" y="2625"/>
                   </a:lnTo>
                   <a:lnTo>
                     <a:pt x="0" y="0"/>
@@ -4616,312 +4616,312 @@
           </p:nvSpPr>
           <p:spPr>
             <a:xfrm>
-              <a:off x="1172049" y="3325737"/>
-              <a:ext cx="7090630" cy="1983885"/>
+              <a:off x="1172049" y="3339507"/>
+              <a:ext cx="7090630" cy="1967501"/>
             </a:xfrm>
             <a:custGeom>
               <a:avLst/>
               <a:pathLst>
-                <a:path w="7090630" h="1983885">
+                <a:path w="7090630" h="1967501">
                   <a:moveTo>
                     <a:pt x="0" y="0"/>
                   </a:moveTo>
                   <a:lnTo>
-                    <a:pt x="71622" y="49009"/>
-                  </a:lnTo>
-                  <a:lnTo>
-                    <a:pt x="143245" y="96942"/>
-                  </a:lnTo>
-                  <a:lnTo>
-                    <a:pt x="214867" y="143822"/>
-                  </a:lnTo>
-                  <a:lnTo>
-                    <a:pt x="286490" y="189673"/>
-                  </a:lnTo>
-                  <a:lnTo>
-                    <a:pt x="358112" y="234517"/>
-                  </a:lnTo>
-                  <a:lnTo>
-                    <a:pt x="429735" y="278375"/>
-                  </a:lnTo>
-                  <a:lnTo>
-                    <a:pt x="501357" y="321271"/>
-                  </a:lnTo>
-                  <a:lnTo>
-                    <a:pt x="572980" y="363225"/>
-                  </a:lnTo>
-                  <a:lnTo>
-                    <a:pt x="644602" y="404257"/>
-                  </a:lnTo>
-                  <a:lnTo>
-                    <a:pt x="716225" y="444388"/>
-                  </a:lnTo>
-                  <a:lnTo>
-                    <a:pt x="787847" y="483637"/>
-                  </a:lnTo>
-                  <a:lnTo>
-                    <a:pt x="859470" y="522025"/>
-                  </a:lnTo>
-                  <a:lnTo>
-                    <a:pt x="931092" y="559569"/>
-                  </a:lnTo>
-                  <a:lnTo>
-                    <a:pt x="1002715" y="596289"/>
-                  </a:lnTo>
-                  <a:lnTo>
-                    <a:pt x="1074337" y="632203"/>
-                  </a:lnTo>
-                  <a:lnTo>
-                    <a:pt x="1145960" y="667327"/>
-                  </a:lnTo>
-                  <a:lnTo>
-                    <a:pt x="1217582" y="701680"/>
-                  </a:lnTo>
-                  <a:lnTo>
-                    <a:pt x="1289205" y="735279"/>
-                  </a:lnTo>
-                  <a:lnTo>
-                    <a:pt x="1360827" y="768140"/>
-                  </a:lnTo>
-                  <a:lnTo>
-                    <a:pt x="1432450" y="800279"/>
-                  </a:lnTo>
-                  <a:lnTo>
-                    <a:pt x="1504073" y="831713"/>
-                  </a:lnTo>
-                  <a:lnTo>
-                    <a:pt x="1575695" y="862456"/>
-                  </a:lnTo>
-                  <a:lnTo>
-                    <a:pt x="1647318" y="892523"/>
-                  </a:lnTo>
-                  <a:lnTo>
-                    <a:pt x="1718940" y="921931"/>
-                  </a:lnTo>
-                  <a:lnTo>
-                    <a:pt x="1790563" y="950692"/>
-                  </a:lnTo>
-                  <a:lnTo>
-                    <a:pt x="1862185" y="978822"/>
-                  </a:lnTo>
-                  <a:lnTo>
-                    <a:pt x="1933808" y="1006334"/>
-                  </a:lnTo>
-                  <a:lnTo>
-                    <a:pt x="2005430" y="1033242"/>
-                  </a:lnTo>
-                  <a:lnTo>
-                    <a:pt x="2077053" y="1059559"/>
-                  </a:lnTo>
-                  <a:lnTo>
-                    <a:pt x="2148675" y="1085298"/>
-                  </a:lnTo>
-                  <a:lnTo>
-                    <a:pt x="2220298" y="1110472"/>
-                  </a:lnTo>
-                  <a:lnTo>
-                    <a:pt x="2291920" y="1135092"/>
-                  </a:lnTo>
-                  <a:lnTo>
-                    <a:pt x="2363543" y="1159172"/>
-                  </a:lnTo>
-                  <a:lnTo>
-                    <a:pt x="2435165" y="1182724"/>
-                  </a:lnTo>
-                  <a:lnTo>
-                    <a:pt x="2506788" y="1205757"/>
-                  </a:lnTo>
-                  <a:lnTo>
-                    <a:pt x="2578410" y="1228286"/>
-                  </a:lnTo>
-                  <a:lnTo>
-                    <a:pt x="2650033" y="1250319"/>
-                  </a:lnTo>
-                  <a:lnTo>
-                    <a:pt x="2721655" y="1271868"/>
-                  </a:lnTo>
-                  <a:lnTo>
-                    <a:pt x="2793278" y="1292944"/>
-                  </a:lnTo>
-                  <a:lnTo>
-                    <a:pt x="2864901" y="1313557"/>
-                  </a:lnTo>
-                  <a:lnTo>
-                    <a:pt x="2936523" y="1333718"/>
-                  </a:lnTo>
-                  <a:lnTo>
-                    <a:pt x="3008146" y="1353436"/>
-                  </a:lnTo>
-                  <a:lnTo>
-                    <a:pt x="3079768" y="1372720"/>
-                  </a:lnTo>
-                  <a:lnTo>
-                    <a:pt x="3151391" y="1391581"/>
-                  </a:lnTo>
-                  <a:lnTo>
-                    <a:pt x="3223013" y="1410028"/>
-                  </a:lnTo>
-                  <a:lnTo>
-                    <a:pt x="3294636" y="1428070"/>
-                  </a:lnTo>
-                  <a:lnTo>
-                    <a:pt x="3366258" y="1445716"/>
-                  </a:lnTo>
-                  <a:lnTo>
-                    <a:pt x="3437881" y="1462974"/>
-                  </a:lnTo>
-                  <a:lnTo>
-                    <a:pt x="3509503" y="1479853"/>
-                  </a:lnTo>
-                  <a:lnTo>
-                    <a:pt x="3581126" y="1496361"/>
-                  </a:lnTo>
-                  <a:lnTo>
-                    <a:pt x="3652748" y="1512507"/>
-                  </a:lnTo>
-                  <a:lnTo>
-                    <a:pt x="3724371" y="1528298"/>
-                  </a:lnTo>
-                  <a:lnTo>
-                    <a:pt x="3795993" y="1543742"/>
-                  </a:lnTo>
-                  <a:lnTo>
-                    <a:pt x="3867616" y="1558847"/>
-                  </a:lnTo>
-                  <a:lnTo>
-                    <a:pt x="3939238" y="1573620"/>
-                  </a:lnTo>
-                  <a:lnTo>
-                    <a:pt x="4010861" y="1588069"/>
-                  </a:lnTo>
-                  <a:lnTo>
-                    <a:pt x="4082483" y="1602201"/>
-                  </a:lnTo>
-                  <a:lnTo>
-                    <a:pt x="4154106" y="1616022"/>
-                  </a:lnTo>
-                  <a:lnTo>
-                    <a:pt x="4225729" y="1629540"/>
-                  </a:lnTo>
-                  <a:lnTo>
-                    <a:pt x="4297351" y="1642760"/>
-                  </a:lnTo>
-                  <a:lnTo>
-                    <a:pt x="4368974" y="1655691"/>
-                  </a:lnTo>
-                  <a:lnTo>
-                    <a:pt x="4440596" y="1668337"/>
-                  </a:lnTo>
-                  <a:lnTo>
-                    <a:pt x="4512219" y="1680706"/>
-                  </a:lnTo>
-                  <a:lnTo>
-                    <a:pt x="4583841" y="1692803"/>
-                  </a:lnTo>
-                  <a:lnTo>
-                    <a:pt x="4655464" y="1704634"/>
-                  </a:lnTo>
-                  <a:lnTo>
-                    <a:pt x="4727086" y="1716206"/>
-                  </a:lnTo>
-                  <a:lnTo>
-                    <a:pt x="4798709" y="1727523"/>
-                  </a:lnTo>
-                  <a:lnTo>
-                    <a:pt x="4870331" y="1738592"/>
-                  </a:lnTo>
-                  <a:lnTo>
-                    <a:pt x="4941954" y="1749418"/>
-                  </a:lnTo>
-                  <a:lnTo>
-                    <a:pt x="5013576" y="1760006"/>
-                  </a:lnTo>
-                  <a:lnTo>
-                    <a:pt x="5085199" y="1770361"/>
-                  </a:lnTo>
-                  <a:lnTo>
-                    <a:pt x="5156821" y="1780489"/>
-                  </a:lnTo>
-                  <a:lnTo>
-                    <a:pt x="5228444" y="1790395"/>
-                  </a:lnTo>
-                  <a:lnTo>
-                    <a:pt x="5300066" y="1800083"/>
-                  </a:lnTo>
-                  <a:lnTo>
-                    <a:pt x="5371689" y="1809558"/>
-                  </a:lnTo>
-                  <a:lnTo>
-                    <a:pt x="5443311" y="1818825"/>
-                  </a:lnTo>
-                  <a:lnTo>
-                    <a:pt x="5514934" y="1827888"/>
-                  </a:lnTo>
-                  <a:lnTo>
-                    <a:pt x="5586557" y="1836753"/>
-                  </a:lnTo>
-                  <a:lnTo>
-                    <a:pt x="5658179" y="1845423"/>
-                  </a:lnTo>
-                  <a:lnTo>
-                    <a:pt x="5729802" y="1853902"/>
-                  </a:lnTo>
-                  <a:lnTo>
-                    <a:pt x="5801424" y="1862196"/>
-                  </a:lnTo>
-                  <a:lnTo>
-                    <a:pt x="5873047" y="1870307"/>
-                  </a:lnTo>
-                  <a:lnTo>
-                    <a:pt x="5944669" y="1878240"/>
-                  </a:lnTo>
-                  <a:lnTo>
-                    <a:pt x="6016292" y="1885998"/>
-                  </a:lnTo>
-                  <a:lnTo>
-                    <a:pt x="6087914" y="1893587"/>
-                  </a:lnTo>
-                  <a:lnTo>
-                    <a:pt x="6159537" y="1901008"/>
-                  </a:lnTo>
-                  <a:lnTo>
-                    <a:pt x="6231159" y="1908267"/>
-                  </a:lnTo>
-                  <a:lnTo>
-                    <a:pt x="6302782" y="1915366"/>
-                  </a:lnTo>
-                  <a:lnTo>
-                    <a:pt x="6374404" y="1922309"/>
-                  </a:lnTo>
-                  <a:lnTo>
-                    <a:pt x="6446027" y="1929100"/>
-                  </a:lnTo>
-                  <a:lnTo>
-                    <a:pt x="6517649" y="1935742"/>
-                  </a:lnTo>
-                  <a:lnTo>
-                    <a:pt x="6589272" y="1942238"/>
-                  </a:lnTo>
-                  <a:lnTo>
-                    <a:pt x="6660894" y="1948591"/>
-                  </a:lnTo>
-                  <a:lnTo>
-                    <a:pt x="6732517" y="1954805"/>
-                  </a:lnTo>
-                  <a:lnTo>
-                    <a:pt x="6804139" y="1960882"/>
-                  </a:lnTo>
-                  <a:lnTo>
-                    <a:pt x="6875762" y="1966825"/>
-                  </a:lnTo>
-                  <a:lnTo>
-                    <a:pt x="6947385" y="1972639"/>
-                  </a:lnTo>
-                  <a:lnTo>
-                    <a:pt x="7019007" y="1978324"/>
-                  </a:lnTo>
-                  <a:lnTo>
-                    <a:pt x="7090630" y="1983885"/>
+                    <a:pt x="71622" y="48341"/>
+                  </a:lnTo>
+                  <a:lnTo>
+                    <a:pt x="143245" y="95628"/>
+                  </a:lnTo>
+                  <a:lnTo>
+                    <a:pt x="214867" y="141885"/>
+                  </a:lnTo>
+                  <a:lnTo>
+                    <a:pt x="286490" y="187134"/>
+                  </a:lnTo>
+                  <a:lnTo>
+                    <a:pt x="358112" y="231396"/>
+                  </a:lnTo>
+                  <a:lnTo>
+                    <a:pt x="429735" y="274693"/>
+                  </a:lnTo>
+                  <a:lnTo>
+                    <a:pt x="501357" y="317047"/>
+                  </a:lnTo>
+                  <a:lnTo>
+                    <a:pt x="572980" y="358477"/>
+                  </a:lnTo>
+                  <a:lnTo>
+                    <a:pt x="644602" y="399005"/>
+                  </a:lnTo>
+                  <a:lnTo>
+                    <a:pt x="716225" y="438649"/>
+                  </a:lnTo>
+                  <a:lnTo>
+                    <a:pt x="787847" y="477428"/>
+                  </a:lnTo>
+                  <a:lnTo>
+                    <a:pt x="859470" y="515363"/>
+                  </a:lnTo>
+                  <a:lnTo>
+                    <a:pt x="931092" y="552471"/>
+                  </a:lnTo>
+                  <a:lnTo>
+                    <a:pt x="1002715" y="588769"/>
+                  </a:lnTo>
+                  <a:lnTo>
+                    <a:pt x="1074337" y="624277"/>
+                  </a:lnTo>
+                  <a:lnTo>
+                    <a:pt x="1145960" y="659010"/>
+                  </a:lnTo>
+                  <a:lnTo>
+                    <a:pt x="1217582" y="692987"/>
+                  </a:lnTo>
+                  <a:lnTo>
+                    <a:pt x="1289205" y="726223"/>
+                  </a:lnTo>
+                  <a:lnTo>
+                    <a:pt x="1360827" y="758734"/>
+                  </a:lnTo>
+                  <a:lnTo>
+                    <a:pt x="1432450" y="790537"/>
+                  </a:lnTo>
+                  <a:lnTo>
+                    <a:pt x="1504073" y="821647"/>
+                  </a:lnTo>
+                  <a:lnTo>
+                    <a:pt x="1575695" y="852078"/>
+                  </a:lnTo>
+                  <a:lnTo>
+                    <a:pt x="1647318" y="881846"/>
+                  </a:lnTo>
+                  <a:lnTo>
+                    <a:pt x="1718940" y="910965"/>
+                  </a:lnTo>
+                  <a:lnTo>
+                    <a:pt x="1790563" y="939450"/>
+                  </a:lnTo>
+                  <a:lnTo>
+                    <a:pt x="1862185" y="967313"/>
+                  </a:lnTo>
+                  <a:lnTo>
+                    <a:pt x="1933808" y="994570"/>
+                  </a:lnTo>
+                  <a:lnTo>
+                    <a:pt x="2005430" y="1021232"/>
+                  </a:lnTo>
+                  <a:lnTo>
+                    <a:pt x="2077053" y="1047313"/>
+                  </a:lnTo>
+                  <a:lnTo>
+                    <a:pt x="2148675" y="1072825"/>
+                  </a:lnTo>
+                  <a:lnTo>
+                    <a:pt x="2220298" y="1097781"/>
+                  </a:lnTo>
+                  <a:lnTo>
+                    <a:pt x="2291920" y="1122194"/>
+                  </a:lnTo>
+                  <a:lnTo>
+                    <a:pt x="2363543" y="1146074"/>
+                  </a:lnTo>
+                  <a:lnTo>
+                    <a:pt x="2435165" y="1169434"/>
+                  </a:lnTo>
+                  <a:lnTo>
+                    <a:pt x="2506788" y="1192284"/>
+                  </a:lnTo>
+                  <a:lnTo>
+                    <a:pt x="2578410" y="1214637"/>
+                  </a:lnTo>
+                  <a:lnTo>
+                    <a:pt x="2650033" y="1236502"/>
+                  </a:lnTo>
+                  <a:lnTo>
+                    <a:pt x="2721655" y="1257890"/>
+                  </a:lnTo>
+                  <a:lnTo>
+                    <a:pt x="2793278" y="1278813"/>
+                  </a:lnTo>
+                  <a:lnTo>
+                    <a:pt x="2864901" y="1299279"/>
+                  </a:lnTo>
+                  <a:lnTo>
+                    <a:pt x="2936523" y="1319299"/>
+                  </a:lnTo>
+                  <a:lnTo>
+                    <a:pt x="3008146" y="1338883"/>
+                  </a:lnTo>
+                  <a:lnTo>
+                    <a:pt x="3079768" y="1358040"/>
+                  </a:lnTo>
+                  <a:lnTo>
+                    <a:pt x="3151391" y="1376779"/>
+                  </a:lnTo>
+                  <a:lnTo>
+                    <a:pt x="3223013" y="1395110"/>
+                  </a:lnTo>
+                  <a:lnTo>
+                    <a:pt x="3294636" y="1413042"/>
+                  </a:lnTo>
+                  <a:lnTo>
+                    <a:pt x="3366258" y="1430582"/>
+                  </a:lnTo>
+                  <a:lnTo>
+                    <a:pt x="3437881" y="1447740"/>
+                  </a:lnTo>
+                  <a:lnTo>
+                    <a:pt x="3509503" y="1464524"/>
+                  </a:lnTo>
+                  <a:lnTo>
+                    <a:pt x="3581126" y="1480943"/>
+                  </a:lnTo>
+                  <a:lnTo>
+                    <a:pt x="3652748" y="1497003"/>
+                  </a:lnTo>
+                  <a:lnTo>
+                    <a:pt x="3724371" y="1512713"/>
+                  </a:lnTo>
+                  <a:lnTo>
+                    <a:pt x="3795993" y="1528081"/>
+                  </a:lnTo>
+                  <a:lnTo>
+                    <a:pt x="3867616" y="1543114"/>
+                  </a:lnTo>
+                  <a:lnTo>
+                    <a:pt x="3939238" y="1557819"/>
+                  </a:lnTo>
+                  <a:lnTo>
+                    <a:pt x="4010861" y="1572204"/>
+                  </a:lnTo>
+                  <a:lnTo>
+                    <a:pt x="4082483" y="1586275"/>
+                  </a:lnTo>
+                  <a:lnTo>
+                    <a:pt x="4154106" y="1600040"/>
+                  </a:lnTo>
+                  <a:lnTo>
+                    <a:pt x="4225729" y="1613504"/>
+                  </a:lnTo>
+                  <a:lnTo>
+                    <a:pt x="4297351" y="1626675"/>
+                  </a:lnTo>
+                  <a:lnTo>
+                    <a:pt x="4368974" y="1639559"/>
+                  </a:lnTo>
+                  <a:lnTo>
+                    <a:pt x="4440596" y="1652162"/>
+                  </a:lnTo>
+                  <a:lnTo>
+                    <a:pt x="4512219" y="1664490"/>
+                  </a:lnTo>
+                  <a:lnTo>
+                    <a:pt x="4583841" y="1676549"/>
+                  </a:lnTo>
+                  <a:lnTo>
+                    <a:pt x="4655464" y="1688346"/>
+                  </a:lnTo>
+                  <a:lnTo>
+                    <a:pt x="4727086" y="1699886"/>
+                  </a:lnTo>
+                  <a:lnTo>
+                    <a:pt x="4798709" y="1711174"/>
+                  </a:lnTo>
+                  <a:lnTo>
+                    <a:pt x="4870331" y="1722216"/>
+                  </a:lnTo>
+                  <a:lnTo>
+                    <a:pt x="4941954" y="1733017"/>
+                  </a:lnTo>
+                  <a:lnTo>
+                    <a:pt x="5013576" y="1743583"/>
+                  </a:lnTo>
+                  <a:lnTo>
+                    <a:pt x="5085199" y="1753918"/>
+                  </a:lnTo>
+                  <a:lnTo>
+                    <a:pt x="5156821" y="1764028"/>
+                  </a:lnTo>
+                  <a:lnTo>
+                    <a:pt x="5228444" y="1773918"/>
+                  </a:lnTo>
+                  <a:lnTo>
+                    <a:pt x="5300066" y="1783592"/>
+                  </a:lnTo>
+                  <a:lnTo>
+                    <a:pt x="5371689" y="1793056"/>
+                  </a:lnTo>
+                  <a:lnTo>
+                    <a:pt x="5443311" y="1802313"/>
+                  </a:lnTo>
+                  <a:lnTo>
+                    <a:pt x="5514934" y="1811368"/>
+                  </a:lnTo>
+                  <a:lnTo>
+                    <a:pt x="5586557" y="1820226"/>
+                  </a:lnTo>
+                  <a:lnTo>
+                    <a:pt x="5658179" y="1828891"/>
+                  </a:lnTo>
+                  <a:lnTo>
+                    <a:pt x="5729802" y="1837367"/>
+                  </a:lnTo>
+                  <a:lnTo>
+                    <a:pt x="5801424" y="1845658"/>
+                  </a:lnTo>
+                  <a:lnTo>
+                    <a:pt x="5873047" y="1853769"/>
+                  </a:lnTo>
+                  <a:lnTo>
+                    <a:pt x="5944669" y="1861702"/>
+                  </a:lnTo>
+                  <a:lnTo>
+                    <a:pt x="6016292" y="1869463"/>
+                  </a:lnTo>
+                  <a:lnTo>
+                    <a:pt x="6087914" y="1877055"/>
+                  </a:lnTo>
+                  <a:lnTo>
+                    <a:pt x="6159537" y="1884481"/>
+                  </a:lnTo>
+                  <a:lnTo>
+                    <a:pt x="6231159" y="1891745"/>
+                  </a:lnTo>
+                  <a:lnTo>
+                    <a:pt x="6302782" y="1898851"/>
+                  </a:lnTo>
+                  <a:lnTo>
+                    <a:pt x="6374404" y="1905802"/>
+                  </a:lnTo>
+                  <a:lnTo>
+                    <a:pt x="6446027" y="1912602"/>
+                  </a:lnTo>
+                  <a:lnTo>
+                    <a:pt x="6517649" y="1919253"/>
+                  </a:lnTo>
+                  <a:lnTo>
+                    <a:pt x="6589272" y="1925759"/>
+                  </a:lnTo>
+                  <a:lnTo>
+                    <a:pt x="6660894" y="1932124"/>
+                  </a:lnTo>
+                  <a:lnTo>
+                    <a:pt x="6732517" y="1938350"/>
+                  </a:lnTo>
+                  <a:lnTo>
+                    <a:pt x="6804139" y="1944440"/>
+                  </a:lnTo>
+                  <a:lnTo>
+                    <a:pt x="6875762" y="1950397"/>
+                  </a:lnTo>
+                  <a:lnTo>
+                    <a:pt x="6947385" y="1956225"/>
+                  </a:lnTo>
+                  <a:lnTo>
+                    <a:pt x="7019007" y="1961925"/>
+                  </a:lnTo>
+                  <a:lnTo>
+                    <a:pt x="7090630" y="1967501"/>
                   </a:lnTo>
                 </a:path>
               </a:pathLst>
@@ -4993,7 +4993,7 @@
           </p:nvSpPr>
           <p:spPr>
             <a:xfrm>
-              <a:off x="4363883" y="2073503"/>
+              <a:off x="4368185" y="2073503"/>
               <a:ext cx="0" cy="3649639"/>
             </a:xfrm>
             <a:custGeom>
@@ -5036,7 +5036,7 @@
           </p:nvSpPr>
           <p:spPr>
             <a:xfrm>
-              <a:off x="3178931" y="2073503"/>
+              <a:off x="3176242" y="2073503"/>
               <a:ext cx="0" cy="3649639"/>
             </a:xfrm>
             <a:custGeom>
@@ -5079,7 +5079,7 @@
           </p:nvSpPr>
           <p:spPr>
             <a:xfrm>
-              <a:off x="5373904" y="2073503"/>
+              <a:off x="5386913" y="2073503"/>
               <a:ext cx="0" cy="3649639"/>
             </a:xfrm>
             <a:custGeom>
@@ -5352,7 +5352,7 @@
           </p:nvSpPr>
           <p:spPr>
             <a:xfrm>
-              <a:off x="1536080" y="5785772"/>
+              <a:off x="1536741" y="5785772"/>
               <a:ext cx="161574" cy="80101"/>
             </a:xfrm>
             <a:prstGeom prst="rect">
@@ -5398,7 +5398,7 @@
           </p:nvSpPr>
           <p:spPr>
             <a:xfrm>
-              <a:off x="2439408" y="5785772"/>
+              <a:off x="2439256" y="5785772"/>
               <a:ext cx="161574" cy="80101"/>
             </a:xfrm>
             <a:prstGeom prst="rect">
@@ -5444,7 +5444,7 @@
           </p:nvSpPr>
           <p:spPr>
             <a:xfrm>
-              <a:off x="3342736" y="5785772"/>
+              <a:off x="3341771" y="5785772"/>
               <a:ext cx="161574" cy="80101"/>
             </a:xfrm>
             <a:prstGeom prst="rect">
@@ -5490,7 +5490,7 @@
           </p:nvSpPr>
           <p:spPr>
             <a:xfrm>
-              <a:off x="4246063" y="5785772"/>
+              <a:off x="4244287" y="5785772"/>
               <a:ext cx="161574" cy="80101"/>
             </a:xfrm>
             <a:prstGeom prst="rect">
@@ -5536,7 +5536,7 @@
           </p:nvSpPr>
           <p:spPr>
             <a:xfrm>
-              <a:off x="5199088" y="5785772"/>
+              <a:off x="5196500" y="5785772"/>
               <a:ext cx="62179" cy="80101"/>
             </a:xfrm>
             <a:prstGeom prst="rect">
@@ -5582,7 +5582,7 @@
           </p:nvSpPr>
           <p:spPr>
             <a:xfrm>
-              <a:off x="6071326" y="5785772"/>
+              <a:off x="6067926" y="5785772"/>
               <a:ext cx="124358" cy="80101"/>
             </a:xfrm>
             <a:prstGeom prst="rect">
@@ -5628,7 +5628,7 @@
           </p:nvSpPr>
           <p:spPr>
             <a:xfrm>
-              <a:off x="6974654" y="5785772"/>
+              <a:off x="6970441" y="5785772"/>
               <a:ext cx="124358" cy="80101"/>
             </a:xfrm>
             <a:prstGeom prst="rect">
@@ -5674,7 +5674,7 @@
           </p:nvSpPr>
           <p:spPr>
             <a:xfrm>
-              <a:off x="7877981" y="5785772"/>
+              <a:off x="7872957" y="5785772"/>
               <a:ext cx="124358" cy="80101"/>
             </a:xfrm>
             <a:prstGeom prst="rect">
@@ -5845,7 +5845,7 @@
                   <a:latin typeface="Helvetica"/>
                   <a:cs typeface="Helvetica"/>
                 </a:rPr>
-                <a:t>subHR per 10 % decline: 1.32 (1.04-1.68), p_Bonf = 0.137 (n = 6)  |  per IQR decline (Δ = 24.3 %): 1.98 (1.10-3.55)  |  IQR: [-22.7, 1.6] %</a:t>
+                <a:t>subHR per 10 % decline: 1.32 (1.04-1.68), p_Bonf = 0.149 (n = 6)  |  per IQR decline (Δ = 24.5 %): 1.97 (1.09-3.58)  |  IQR: [-22.7, 1.8] %</a:t>
               </a:r>
             </a:p>
           </p:txBody>
